--- a/Dusza2025-2026_v2.pptx
+++ b/Dusza2025-2026_v2.pptx
@@ -7,16 +7,15 @@
   <p:sldIdLst>
     <p:sldId id="256" r:id="rId2"/>
     <p:sldId id="257" r:id="rId3"/>
-    <p:sldId id="265" r:id="rId4"/>
-    <p:sldId id="258" r:id="rId5"/>
-    <p:sldId id="266" r:id="rId6"/>
-    <p:sldId id="267" r:id="rId7"/>
-    <p:sldId id="268" r:id="rId8"/>
-    <p:sldId id="271" r:id="rId9"/>
-    <p:sldId id="270" r:id="rId10"/>
-    <p:sldId id="263" r:id="rId11"/>
-    <p:sldId id="264" r:id="rId12"/>
-    <p:sldId id="272" r:id="rId13"/>
+    <p:sldId id="258" r:id="rId4"/>
+    <p:sldId id="266" r:id="rId5"/>
+    <p:sldId id="267" r:id="rId6"/>
+    <p:sldId id="268" r:id="rId7"/>
+    <p:sldId id="271" r:id="rId8"/>
+    <p:sldId id="270" r:id="rId9"/>
+    <p:sldId id="263" r:id="rId10"/>
+    <p:sldId id="264" r:id="rId11"/>
+    <p:sldId id="272" r:id="rId12"/>
   </p:sldIdLst>
   <p:sldSz cx="12192000" cy="6858000"/>
   <p:notesSz cx="6858000" cy="9144000"/>
@@ -264,7 +263,7 @@
           <a:p>
             <a:fld id="{F5F1901C-D33B-4565-A7E4-5DF903098DB6}" type="datetimeFigureOut">
               <a:rPr lang="hu-HU" smtClean="0"/>
-              <a:t>2026. 02. 13.</a:t>
+              <a:t>2026. 02. 19.</a:t>
             </a:fld>
             <a:endParaRPr lang="hu-HU"/>
           </a:p>
@@ -444,7 +443,7 @@
           <a:p>
             <a:fld id="{F5F1901C-D33B-4565-A7E4-5DF903098DB6}" type="datetimeFigureOut">
               <a:rPr lang="hu-HU" smtClean="0"/>
-              <a:t>2026. 02. 13.</a:t>
+              <a:t>2026. 02. 19.</a:t>
             </a:fld>
             <a:endParaRPr lang="hu-HU"/>
           </a:p>
@@ -634,7 +633,7 @@
           <a:p>
             <a:fld id="{F5F1901C-D33B-4565-A7E4-5DF903098DB6}" type="datetimeFigureOut">
               <a:rPr lang="hu-HU" smtClean="0"/>
-              <a:t>2026. 02. 13.</a:t>
+              <a:t>2026. 02. 19.</a:t>
             </a:fld>
             <a:endParaRPr lang="hu-HU"/>
           </a:p>
@@ -814,7 +813,7 @@
           <a:p>
             <a:fld id="{F5F1901C-D33B-4565-A7E4-5DF903098DB6}" type="datetimeFigureOut">
               <a:rPr lang="hu-HU" smtClean="0"/>
-              <a:t>2026. 02. 13.</a:t>
+              <a:t>2026. 02. 19.</a:t>
             </a:fld>
             <a:endParaRPr lang="hu-HU"/>
           </a:p>
@@ -1071,7 +1070,7 @@
           <a:p>
             <a:fld id="{F5F1901C-D33B-4565-A7E4-5DF903098DB6}" type="datetimeFigureOut">
               <a:rPr lang="hu-HU" smtClean="0"/>
-              <a:t>2026. 02. 13.</a:t>
+              <a:t>2026. 02. 19.</a:t>
             </a:fld>
             <a:endParaRPr lang="hu-HU"/>
           </a:p>
@@ -1312,7 +1311,7 @@
           <a:p>
             <a:fld id="{F5F1901C-D33B-4565-A7E4-5DF903098DB6}" type="datetimeFigureOut">
               <a:rPr lang="hu-HU" smtClean="0"/>
-              <a:t>2026. 02. 13.</a:t>
+              <a:t>2026. 02. 19.</a:t>
             </a:fld>
             <a:endParaRPr lang="hu-HU"/>
           </a:p>
@@ -1688,7 +1687,7 @@
           <a:p>
             <a:fld id="{F5F1901C-D33B-4565-A7E4-5DF903098DB6}" type="datetimeFigureOut">
               <a:rPr lang="hu-HU" smtClean="0"/>
-              <a:t>2026. 02. 13.</a:t>
+              <a:t>2026. 02. 19.</a:t>
             </a:fld>
             <a:endParaRPr lang="hu-HU"/>
           </a:p>
@@ -1817,7 +1816,7 @@
           <a:p>
             <a:fld id="{F5F1901C-D33B-4565-A7E4-5DF903098DB6}" type="datetimeFigureOut">
               <a:rPr lang="hu-HU" smtClean="0"/>
-              <a:t>2026. 02. 13.</a:t>
+              <a:t>2026. 02. 19.</a:t>
             </a:fld>
             <a:endParaRPr lang="hu-HU"/>
           </a:p>
@@ -1924,7 +1923,7 @@
           <a:p>
             <a:fld id="{F5F1901C-D33B-4565-A7E4-5DF903098DB6}" type="datetimeFigureOut">
               <a:rPr lang="hu-HU" smtClean="0"/>
-              <a:t>2026. 02. 13.</a:t>
+              <a:t>2026. 02. 19.</a:t>
             </a:fld>
             <a:endParaRPr lang="hu-HU"/>
           </a:p>
@@ -2211,7 +2210,7 @@
           <a:p>
             <a:fld id="{F5F1901C-D33B-4565-A7E4-5DF903098DB6}" type="datetimeFigureOut">
               <a:rPr lang="hu-HU" smtClean="0"/>
-              <a:t>2026. 02. 13.</a:t>
+              <a:t>2026. 02. 19.</a:t>
             </a:fld>
             <a:endParaRPr lang="hu-HU"/>
           </a:p>
@@ -2475,7 +2474,7 @@
           <a:p>
             <a:fld id="{F5F1901C-D33B-4565-A7E4-5DF903098DB6}" type="datetimeFigureOut">
               <a:rPr lang="hu-HU" smtClean="0"/>
-              <a:t>2026. 02. 13.</a:t>
+              <a:t>2026. 02. 19.</a:t>
             </a:fld>
             <a:endParaRPr lang="hu-HU"/>
           </a:p>
@@ -2698,7 +2697,7 @@
           <a:p>
             <a:fld id="{F5F1901C-D33B-4565-A7E4-5DF903098DB6}" type="datetimeFigureOut">
               <a:rPr lang="hu-HU" smtClean="0"/>
-              <a:t>2026. 02. 13.</a:t>
+              <a:t>2026. 02. 19.</a:t>
             </a:fld>
             <a:endParaRPr lang="hu-HU"/>
           </a:p>
@@ -3174,7 +3173,7 @@
               </a:rPr>
               <a:t>DSZC Mechwart András Gépipari és Informatikai Technikum</a:t>
             </a:r>
-            <a:endParaRPr lang="hu-HU"/>
+            <a:endParaRPr lang="hu-HU" dirty="0"/>
           </a:p>
         </p:txBody>
       </p:sp>
@@ -3325,10 +3324,10 @@
       </p:pic>
       <p:sp>
         <p:nvSpPr>
-          <p:cNvPr id="12" name="Szövegdoboz 4">
+          <p:cNvPr id="3" name="Szövegdoboz 1">
             <a:extLst>
               <a:ext uri="{FF2B5EF4-FFF2-40B4-BE49-F238E27FC236}">
-                <a16:creationId xmlns:a16="http://schemas.microsoft.com/office/drawing/2014/main" id="{00D9E922-33AD-C931-33DD-CB7CC4458474}"/>
+                <a16:creationId xmlns:a16="http://schemas.microsoft.com/office/drawing/2014/main" id="{F767FFF9-A401-848C-3031-3B6CACC45720}"/>
               </a:ext>
             </a:extLst>
           </p:cNvPr>
@@ -3337,13 +3336,17 @@
         </p:nvSpPr>
         <p:spPr>
           <a:xfrm>
-            <a:off x="-557" y="6153544"/>
-            <a:ext cx="3840636" cy="461665"/>
+            <a:off x="66702" y="6058914"/>
+            <a:ext cx="4612224" cy="646331"/>
           </a:xfrm>
           <a:prstGeom prst="rect">
             <a:avLst/>
           </a:prstGeom>
-          <a:noFill/>
+          <a:solidFill>
+            <a:srgbClr val="171515">
+              <a:alpha val="53000"/>
+            </a:srgbClr>
+          </a:solidFill>
           <a:ln>
             <a:solidFill>
               <a:schemeClr val="tx1"/>
@@ -3351,118 +3354,23 @@
           </a:ln>
         </p:spPr>
         <p:txBody>
-          <a:bodyPr rot="0" spcFirstLastPara="0" vert="horz" wrap="square" lIns="91440" tIns="45720" rIns="91440" bIns="45720" numCol="1" spcCol="0" rtlCol="0" fromWordArt="0" anchor="t" anchorCtr="0" forceAA="0" compatLnSpc="1">
+          <a:bodyPr rot="0" spcFirstLastPara="0" vertOverflow="overflow" horzOverflow="overflow" vert="horz" wrap="square" lIns="91440" tIns="45720" rIns="91440" bIns="45720" numCol="1" spcCol="0" rtlCol="0" fromWordArt="0" anchor="t" anchorCtr="0" forceAA="0" compatLnSpc="1">
             <a:prstTxWarp prst="textNoShape">
               <a:avLst/>
             </a:prstTxWarp>
             <a:spAutoFit/>
           </a:bodyPr>
-          <a:lstStyle>
-            <a:defPPr>
-              <a:defRPr lang="en-US"/>
-            </a:defPPr>
-            <a:lvl1pPr marL="0" algn="l" defTabSz="914400" rtl="0" eaLnBrk="1" latinLnBrk="0" hangingPunct="1">
-              <a:defRPr sz="1800" kern="1200">
-                <a:solidFill>
-                  <a:schemeClr val="tx1"/>
-                </a:solidFill>
-                <a:latin typeface="+mn-lt"/>
-                <a:ea typeface="+mn-ea"/>
-                <a:cs typeface="+mn-cs"/>
-              </a:defRPr>
-            </a:lvl1pPr>
-            <a:lvl2pPr marL="457200" algn="l" defTabSz="914400" rtl="0" eaLnBrk="1" latinLnBrk="0" hangingPunct="1">
-              <a:defRPr sz="1800" kern="1200">
-                <a:solidFill>
-                  <a:schemeClr val="tx1"/>
-                </a:solidFill>
-                <a:latin typeface="+mn-lt"/>
-                <a:ea typeface="+mn-ea"/>
-                <a:cs typeface="+mn-cs"/>
-              </a:defRPr>
-            </a:lvl2pPr>
-            <a:lvl3pPr marL="914400" algn="l" defTabSz="914400" rtl="0" eaLnBrk="1" latinLnBrk="0" hangingPunct="1">
-              <a:defRPr sz="1800" kern="1200">
-                <a:solidFill>
-                  <a:schemeClr val="tx1"/>
-                </a:solidFill>
-                <a:latin typeface="+mn-lt"/>
-                <a:ea typeface="+mn-ea"/>
-                <a:cs typeface="+mn-cs"/>
-              </a:defRPr>
-            </a:lvl3pPr>
-            <a:lvl4pPr marL="1371600" algn="l" defTabSz="914400" rtl="0" eaLnBrk="1" latinLnBrk="0" hangingPunct="1">
-              <a:defRPr sz="1800" kern="1200">
-                <a:solidFill>
-                  <a:schemeClr val="tx1"/>
-                </a:solidFill>
-                <a:latin typeface="+mn-lt"/>
-                <a:ea typeface="+mn-ea"/>
-                <a:cs typeface="+mn-cs"/>
-              </a:defRPr>
-            </a:lvl4pPr>
-            <a:lvl5pPr marL="1828800" algn="l" defTabSz="914400" rtl="0" eaLnBrk="1" latinLnBrk="0" hangingPunct="1">
-              <a:defRPr sz="1800" kern="1200">
-                <a:solidFill>
-                  <a:schemeClr val="tx1"/>
-                </a:solidFill>
-                <a:latin typeface="+mn-lt"/>
-                <a:ea typeface="+mn-ea"/>
-                <a:cs typeface="+mn-cs"/>
-              </a:defRPr>
-            </a:lvl5pPr>
-            <a:lvl6pPr marL="2286000" algn="l" defTabSz="914400" rtl="0" eaLnBrk="1" latinLnBrk="0" hangingPunct="1">
-              <a:defRPr sz="1800" kern="1200">
-                <a:solidFill>
-                  <a:schemeClr val="tx1"/>
-                </a:solidFill>
-                <a:latin typeface="+mn-lt"/>
-                <a:ea typeface="+mn-ea"/>
-                <a:cs typeface="+mn-cs"/>
-              </a:defRPr>
-            </a:lvl6pPr>
-            <a:lvl7pPr marL="2743200" algn="l" defTabSz="914400" rtl="0" eaLnBrk="1" latinLnBrk="0" hangingPunct="1">
-              <a:defRPr sz="1800" kern="1200">
-                <a:solidFill>
-                  <a:schemeClr val="tx1"/>
-                </a:solidFill>
-                <a:latin typeface="+mn-lt"/>
-                <a:ea typeface="+mn-ea"/>
-                <a:cs typeface="+mn-cs"/>
-              </a:defRPr>
-            </a:lvl7pPr>
-            <a:lvl8pPr marL="3200400" algn="l" defTabSz="914400" rtl="0" eaLnBrk="1" latinLnBrk="0" hangingPunct="1">
-              <a:defRPr sz="1800" kern="1200">
-                <a:solidFill>
-                  <a:schemeClr val="tx1"/>
-                </a:solidFill>
-                <a:latin typeface="+mn-lt"/>
-                <a:ea typeface="+mn-ea"/>
-                <a:cs typeface="+mn-cs"/>
-              </a:defRPr>
-            </a:lvl8pPr>
-            <a:lvl9pPr marL="3657600" algn="l" defTabSz="914400" rtl="0" eaLnBrk="1" latinLnBrk="0" hangingPunct="1">
-              <a:defRPr sz="1800" kern="1200">
-                <a:solidFill>
-                  <a:schemeClr val="tx1"/>
-                </a:solidFill>
-                <a:latin typeface="+mn-lt"/>
-                <a:ea typeface="+mn-ea"/>
-                <a:cs typeface="+mn-cs"/>
-              </a:defRPr>
-            </a:lvl9pPr>
-          </a:lstStyle>
+          <a:lstStyle/>
           <a:p>
             <a:r>
-              <a:rPr lang="hu-HU" sz="2400" dirty="0">
+              <a:rPr lang="hu-HU" dirty="0">
                 <a:solidFill>
                   <a:schemeClr val="bg1"/>
                 </a:solidFill>
-                <a:latin typeface="Futura"/>
-                <a:cs typeface="Helvetica" panose="020B0604020202020204" pitchFamily="34" charset="0"/>
               </a:rPr>
-              <a:t>Dusza Műhely 2025-2026</a:t>
+              <a:t>22. Neumann János Kárpát-medencei Informatikai Programtermék Verseny</a:t>
             </a:r>
+            <a:endParaRPr lang="hu-HU" dirty="0"/>
           </a:p>
         </p:txBody>
       </p:sp>
@@ -3492,833 +3400,6 @@
 </file>
 
 <file path=ppt/slides/slide10.xml><?xml version="1.0" encoding="utf-8"?>
-<p:sld xmlns:a="http://schemas.openxmlformats.org/drawingml/2006/main" xmlns:r="http://schemas.openxmlformats.org/officeDocument/2006/relationships" xmlns:p="http://schemas.openxmlformats.org/presentationml/2006/main">
-  <p:cSld>
-    <p:bg>
-      <p:bgPr>
-        <a:blipFill>
-          <a:blip r:embed="rId2"/>
-          <a:stretch>
-            <a:fillRect/>
-          </a:stretch>
-        </a:blipFill>
-        <a:effectLst/>
-      </p:bgPr>
-    </p:bg>
-    <p:spTree>
-      <p:nvGrpSpPr>
-        <p:cNvPr id="1" name=""/>
-        <p:cNvGrpSpPr/>
-        <p:nvPr/>
-      </p:nvGrpSpPr>
-      <p:grpSpPr>
-        <a:xfrm>
-          <a:off x="0" y="0"/>
-          <a:ext cx="0" cy="0"/>
-          <a:chOff x="0" y="0"/>
-          <a:chExt cx="0" cy="0"/>
-        </a:xfrm>
-      </p:grpSpPr>
-      <p:sp>
-        <p:nvSpPr>
-          <p:cNvPr id="8" name="Cím 1">
-            <a:extLst>
-              <a:ext uri="{FF2B5EF4-FFF2-40B4-BE49-F238E27FC236}">
-                <a16:creationId xmlns:a16="http://schemas.microsoft.com/office/drawing/2014/main" id="{4826DAFD-3F53-EAE5-5E9A-D8280B521434}"/>
-              </a:ext>
-            </a:extLst>
-          </p:cNvPr>
-          <p:cNvSpPr txBox="1">
-            <a:spLocks/>
-          </p:cNvSpPr>
-          <p:nvPr/>
-        </p:nvSpPr>
-        <p:spPr>
-          <a:xfrm>
-            <a:off x="537412" y="214731"/>
-            <a:ext cx="11127204" cy="1074905"/>
-          </a:xfrm>
-          <a:custGeom>
-            <a:avLst/>
-            <a:gdLst>
-              <a:gd name="csX0" fmla="*/ 0 w 11127204"/>
-              <a:gd name="csY0" fmla="*/ 0 h 1074905"/>
-              <a:gd name="csX1" fmla="*/ 472906 w 11127204"/>
-              <a:gd name="csY1" fmla="*/ 0 h 1074905"/>
-              <a:gd name="csX2" fmla="*/ 834540 w 11127204"/>
-              <a:gd name="csY2" fmla="*/ 0 h 1074905"/>
-              <a:gd name="csX3" fmla="*/ 1641263 w 11127204"/>
-              <a:gd name="csY3" fmla="*/ 0 h 1074905"/>
-              <a:gd name="csX4" fmla="*/ 2559257 w 11127204"/>
-              <a:gd name="csY4" fmla="*/ 0 h 1074905"/>
-              <a:gd name="csX5" fmla="*/ 2920891 w 11127204"/>
-              <a:gd name="csY5" fmla="*/ 0 h 1074905"/>
-              <a:gd name="csX6" fmla="*/ 3838885 w 11127204"/>
-              <a:gd name="csY6" fmla="*/ 0 h 1074905"/>
-              <a:gd name="csX7" fmla="*/ 4423064 w 11127204"/>
-              <a:gd name="csY7" fmla="*/ 0 h 1074905"/>
-              <a:gd name="csX8" fmla="*/ 4895970 w 11127204"/>
-              <a:gd name="csY8" fmla="*/ 0 h 1074905"/>
-              <a:gd name="csX9" fmla="*/ 5368876 w 11127204"/>
-              <a:gd name="csY9" fmla="*/ 0 h 1074905"/>
-              <a:gd name="csX10" fmla="*/ 6064326 w 11127204"/>
-              <a:gd name="csY10" fmla="*/ 0 h 1074905"/>
-              <a:gd name="csX11" fmla="*/ 6871048 w 11127204"/>
-              <a:gd name="csY11" fmla="*/ 0 h 1074905"/>
-              <a:gd name="csX12" fmla="*/ 7789043 w 11127204"/>
-              <a:gd name="csY12" fmla="*/ 0 h 1074905"/>
-              <a:gd name="csX13" fmla="*/ 8707037 w 11127204"/>
-              <a:gd name="csY13" fmla="*/ 0 h 1074905"/>
-              <a:gd name="csX14" fmla="*/ 9513759 w 11127204"/>
-              <a:gd name="csY14" fmla="*/ 0 h 1074905"/>
-              <a:gd name="csX15" fmla="*/ 9986666 w 11127204"/>
-              <a:gd name="csY15" fmla="*/ 0 h 1074905"/>
-              <a:gd name="csX16" fmla="*/ 10459572 w 11127204"/>
-              <a:gd name="csY16" fmla="*/ 0 h 1074905"/>
-              <a:gd name="csX17" fmla="*/ 11127204 w 11127204"/>
-              <a:gd name="csY17" fmla="*/ 0 h 1074905"/>
-              <a:gd name="csX18" fmla="*/ 11127204 w 11127204"/>
-              <a:gd name="csY18" fmla="*/ 548202 h 1074905"/>
-              <a:gd name="csX19" fmla="*/ 11127204 w 11127204"/>
-              <a:gd name="csY19" fmla="*/ 1074905 h 1074905"/>
-              <a:gd name="csX20" fmla="*/ 10320482 w 11127204"/>
-              <a:gd name="csY20" fmla="*/ 1074905 h 1074905"/>
-              <a:gd name="csX21" fmla="*/ 9625031 w 11127204"/>
-              <a:gd name="csY21" fmla="*/ 1074905 h 1074905"/>
-              <a:gd name="csX22" fmla="*/ 8929581 w 11127204"/>
-              <a:gd name="csY22" fmla="*/ 1074905 h 1074905"/>
-              <a:gd name="csX23" fmla="*/ 8234131 w 11127204"/>
-              <a:gd name="csY23" fmla="*/ 1074905 h 1074905"/>
-              <a:gd name="csX24" fmla="*/ 7761225 w 11127204"/>
-              <a:gd name="csY24" fmla="*/ 1074905 h 1074905"/>
-              <a:gd name="csX25" fmla="*/ 6843230 w 11127204"/>
-              <a:gd name="csY25" fmla="*/ 1074905 h 1074905"/>
-              <a:gd name="csX26" fmla="*/ 6370324 w 11127204"/>
-              <a:gd name="csY26" fmla="*/ 1074905 h 1074905"/>
-              <a:gd name="csX27" fmla="*/ 6008690 w 11127204"/>
-              <a:gd name="csY27" fmla="*/ 1074905 h 1074905"/>
-              <a:gd name="csX28" fmla="*/ 5090696 w 11127204"/>
-              <a:gd name="csY28" fmla="*/ 1074905 h 1074905"/>
-              <a:gd name="csX29" fmla="*/ 4617790 w 11127204"/>
-              <a:gd name="csY29" fmla="*/ 1074905 h 1074905"/>
-              <a:gd name="csX30" fmla="*/ 4033611 w 11127204"/>
-              <a:gd name="csY30" fmla="*/ 1074905 h 1074905"/>
-              <a:gd name="csX31" fmla="*/ 3115617 w 11127204"/>
-              <a:gd name="csY31" fmla="*/ 1074905 h 1074905"/>
-              <a:gd name="csX32" fmla="*/ 2197623 w 11127204"/>
-              <a:gd name="csY32" fmla="*/ 1074905 h 1074905"/>
-              <a:gd name="csX33" fmla="*/ 1502173 w 11127204"/>
-              <a:gd name="csY33" fmla="*/ 1074905 h 1074905"/>
-              <a:gd name="csX34" fmla="*/ 917994 w 11127204"/>
-              <a:gd name="csY34" fmla="*/ 1074905 h 1074905"/>
-              <a:gd name="csX35" fmla="*/ 0 w 11127204"/>
-              <a:gd name="csY35" fmla="*/ 1074905 h 1074905"/>
-              <a:gd name="csX36" fmla="*/ 0 w 11127204"/>
-              <a:gd name="csY36" fmla="*/ 526703 h 1074905"/>
-              <a:gd name="csX37" fmla="*/ 0 w 11127204"/>
-              <a:gd name="csY37" fmla="*/ 0 h 1074905"/>
-            </a:gdLst>
-            <a:ahLst/>
-            <a:cxnLst>
-              <a:cxn ang="0">
-                <a:pos x="csX0" y="csY0"/>
-              </a:cxn>
-              <a:cxn ang="0">
-                <a:pos x="csX1" y="csY1"/>
-              </a:cxn>
-              <a:cxn ang="0">
-                <a:pos x="csX2" y="csY2"/>
-              </a:cxn>
-              <a:cxn ang="0">
-                <a:pos x="csX3" y="csY3"/>
-              </a:cxn>
-              <a:cxn ang="0">
-                <a:pos x="csX4" y="csY4"/>
-              </a:cxn>
-              <a:cxn ang="0">
-                <a:pos x="csX5" y="csY5"/>
-              </a:cxn>
-              <a:cxn ang="0">
-                <a:pos x="csX6" y="csY6"/>
-              </a:cxn>
-              <a:cxn ang="0">
-                <a:pos x="csX7" y="csY7"/>
-              </a:cxn>
-              <a:cxn ang="0">
-                <a:pos x="csX8" y="csY8"/>
-              </a:cxn>
-              <a:cxn ang="0">
-                <a:pos x="csX9" y="csY9"/>
-              </a:cxn>
-              <a:cxn ang="0">
-                <a:pos x="csX10" y="csY10"/>
-              </a:cxn>
-              <a:cxn ang="0">
-                <a:pos x="csX11" y="csY11"/>
-              </a:cxn>
-              <a:cxn ang="0">
-                <a:pos x="csX12" y="csY12"/>
-              </a:cxn>
-              <a:cxn ang="0">
-                <a:pos x="csX13" y="csY13"/>
-              </a:cxn>
-              <a:cxn ang="0">
-                <a:pos x="csX14" y="csY14"/>
-              </a:cxn>
-              <a:cxn ang="0">
-                <a:pos x="csX15" y="csY15"/>
-              </a:cxn>
-              <a:cxn ang="0">
-                <a:pos x="csX16" y="csY16"/>
-              </a:cxn>
-              <a:cxn ang="0">
-                <a:pos x="csX17" y="csY17"/>
-              </a:cxn>
-              <a:cxn ang="0">
-                <a:pos x="csX18" y="csY18"/>
-              </a:cxn>
-              <a:cxn ang="0">
-                <a:pos x="csX19" y="csY19"/>
-              </a:cxn>
-              <a:cxn ang="0">
-                <a:pos x="csX20" y="csY20"/>
-              </a:cxn>
-              <a:cxn ang="0">
-                <a:pos x="csX21" y="csY21"/>
-              </a:cxn>
-              <a:cxn ang="0">
-                <a:pos x="csX22" y="csY22"/>
-              </a:cxn>
-              <a:cxn ang="0">
-                <a:pos x="csX23" y="csY23"/>
-              </a:cxn>
-              <a:cxn ang="0">
-                <a:pos x="csX24" y="csY24"/>
-              </a:cxn>
-              <a:cxn ang="0">
-                <a:pos x="csX25" y="csY25"/>
-              </a:cxn>
-              <a:cxn ang="0">
-                <a:pos x="csX26" y="csY26"/>
-              </a:cxn>
-              <a:cxn ang="0">
-                <a:pos x="csX27" y="csY27"/>
-              </a:cxn>
-              <a:cxn ang="0">
-                <a:pos x="csX28" y="csY28"/>
-              </a:cxn>
-              <a:cxn ang="0">
-                <a:pos x="csX29" y="csY29"/>
-              </a:cxn>
-              <a:cxn ang="0">
-                <a:pos x="csX30" y="csY30"/>
-              </a:cxn>
-              <a:cxn ang="0">
-                <a:pos x="csX31" y="csY31"/>
-              </a:cxn>
-              <a:cxn ang="0">
-                <a:pos x="csX32" y="csY32"/>
-              </a:cxn>
-              <a:cxn ang="0">
-                <a:pos x="csX33" y="csY33"/>
-              </a:cxn>
-              <a:cxn ang="0">
-                <a:pos x="csX34" y="csY34"/>
-              </a:cxn>
-              <a:cxn ang="0">
-                <a:pos x="csX35" y="csY35"/>
-              </a:cxn>
-              <a:cxn ang="0">
-                <a:pos x="csX36" y="csY36"/>
-              </a:cxn>
-              <a:cxn ang="0">
-                <a:pos x="csX37" y="csY37"/>
-              </a:cxn>
-            </a:cxnLst>
-            <a:rect l="l" t="t" r="r" b="b"/>
-            <a:pathLst>
-              <a:path w="11127204" h="1074905" extrusionOk="0">
-                <a:moveTo>
-                  <a:pt x="0" y="0"/>
-                </a:moveTo>
-                <a:cubicBezTo>
-                  <a:pt x="173725" y="7780"/>
-                  <a:pt x="362577" y="-18298"/>
-                  <a:pt x="472906" y="0"/>
-                </a:cubicBezTo>
-                <a:cubicBezTo>
-                  <a:pt x="583235" y="18298"/>
-                  <a:pt x="701416" y="-12323"/>
-                  <a:pt x="834540" y="0"/>
-                </a:cubicBezTo>
-                <a:cubicBezTo>
-                  <a:pt x="967664" y="12323"/>
-                  <a:pt x="1357309" y="36907"/>
-                  <a:pt x="1641263" y="0"/>
-                </a:cubicBezTo>
-                <a:cubicBezTo>
-                  <a:pt x="1925217" y="-36907"/>
-                  <a:pt x="2142541" y="27510"/>
-                  <a:pt x="2559257" y="0"/>
-                </a:cubicBezTo>
-                <a:cubicBezTo>
-                  <a:pt x="2975973" y="-27510"/>
-                  <a:pt x="2747929" y="-15189"/>
-                  <a:pt x="2920891" y="0"/>
-                </a:cubicBezTo>
-                <a:cubicBezTo>
-                  <a:pt x="3093853" y="15189"/>
-                  <a:pt x="3648561" y="-25584"/>
-                  <a:pt x="3838885" y="0"/>
-                </a:cubicBezTo>
-                <a:cubicBezTo>
-                  <a:pt x="4029209" y="25584"/>
-                  <a:pt x="4232161" y="-20498"/>
-                  <a:pt x="4423064" y="0"/>
-                </a:cubicBezTo>
-                <a:cubicBezTo>
-                  <a:pt x="4613967" y="20498"/>
-                  <a:pt x="4797039" y="-13016"/>
-                  <a:pt x="4895970" y="0"/>
-                </a:cubicBezTo>
-                <a:cubicBezTo>
-                  <a:pt x="4994901" y="13016"/>
-                  <a:pt x="5174223" y="21709"/>
-                  <a:pt x="5368876" y="0"/>
-                </a:cubicBezTo>
-                <a:cubicBezTo>
-                  <a:pt x="5563529" y="-21709"/>
-                  <a:pt x="5723187" y="-7574"/>
-                  <a:pt x="6064326" y="0"/>
-                </a:cubicBezTo>
-                <a:cubicBezTo>
-                  <a:pt x="6405465" y="7574"/>
-                  <a:pt x="6468590" y="12486"/>
-                  <a:pt x="6871048" y="0"/>
-                </a:cubicBezTo>
-                <a:cubicBezTo>
-                  <a:pt x="7273506" y="-12486"/>
-                  <a:pt x="7424074" y="-45380"/>
-                  <a:pt x="7789043" y="0"/>
-                </a:cubicBezTo>
-                <a:cubicBezTo>
-                  <a:pt x="8154013" y="45380"/>
-                  <a:pt x="8439666" y="-39445"/>
-                  <a:pt x="8707037" y="0"/>
-                </a:cubicBezTo>
-                <a:cubicBezTo>
-                  <a:pt x="8974408" y="39445"/>
-                  <a:pt x="9147635" y="-12593"/>
-                  <a:pt x="9513759" y="0"/>
-                </a:cubicBezTo>
-                <a:cubicBezTo>
-                  <a:pt x="9879883" y="12593"/>
-                  <a:pt x="9815420" y="1717"/>
-                  <a:pt x="9986666" y="0"/>
-                </a:cubicBezTo>
-                <a:cubicBezTo>
-                  <a:pt x="10157912" y="-1717"/>
-                  <a:pt x="10254876" y="17543"/>
-                  <a:pt x="10459572" y="0"/>
-                </a:cubicBezTo>
-                <a:cubicBezTo>
-                  <a:pt x="10664268" y="-17543"/>
-                  <a:pt x="10968587" y="-18155"/>
-                  <a:pt x="11127204" y="0"/>
-                </a:cubicBezTo>
-                <a:cubicBezTo>
-                  <a:pt x="11134549" y="148727"/>
-                  <a:pt x="11147386" y="365366"/>
-                  <a:pt x="11127204" y="548202"/>
-                </a:cubicBezTo>
-                <a:cubicBezTo>
-                  <a:pt x="11107022" y="731038"/>
-                  <a:pt x="11147208" y="823314"/>
-                  <a:pt x="11127204" y="1074905"/>
-                </a:cubicBezTo>
-                <a:cubicBezTo>
-                  <a:pt x="10926449" y="1108939"/>
-                  <a:pt x="10643626" y="1100935"/>
-                  <a:pt x="10320482" y="1074905"/>
-                </a:cubicBezTo>
-                <a:cubicBezTo>
-                  <a:pt x="9997338" y="1048875"/>
-                  <a:pt x="9798690" y="1079340"/>
-                  <a:pt x="9625031" y="1074905"/>
-                </a:cubicBezTo>
-                <a:cubicBezTo>
-                  <a:pt x="9451372" y="1070470"/>
-                  <a:pt x="9260205" y="1063922"/>
-                  <a:pt x="8929581" y="1074905"/>
-                </a:cubicBezTo>
-                <a:cubicBezTo>
-                  <a:pt x="8598957" y="1085889"/>
-                  <a:pt x="8387884" y="1088107"/>
-                  <a:pt x="8234131" y="1074905"/>
-                </a:cubicBezTo>
-                <a:cubicBezTo>
-                  <a:pt x="8080378" y="1061704"/>
-                  <a:pt x="7968841" y="1065103"/>
-                  <a:pt x="7761225" y="1074905"/>
-                </a:cubicBezTo>
-                <a:cubicBezTo>
-                  <a:pt x="7553609" y="1084707"/>
-                  <a:pt x="7173541" y="1103906"/>
-                  <a:pt x="6843230" y="1074905"/>
-                </a:cubicBezTo>
-                <a:cubicBezTo>
-                  <a:pt x="6512920" y="1045904"/>
-                  <a:pt x="6495232" y="1055676"/>
-                  <a:pt x="6370324" y="1074905"/>
-                </a:cubicBezTo>
-                <a:cubicBezTo>
-                  <a:pt x="6245416" y="1094134"/>
-                  <a:pt x="6176547" y="1056994"/>
-                  <a:pt x="6008690" y="1074905"/>
-                </a:cubicBezTo>
-                <a:cubicBezTo>
-                  <a:pt x="5840833" y="1092816"/>
-                  <a:pt x="5316460" y="1053272"/>
-                  <a:pt x="5090696" y="1074905"/>
-                </a:cubicBezTo>
-                <a:cubicBezTo>
-                  <a:pt x="4864932" y="1096538"/>
-                  <a:pt x="4824564" y="1095127"/>
-                  <a:pt x="4617790" y="1074905"/>
-                </a:cubicBezTo>
-                <a:cubicBezTo>
-                  <a:pt x="4411016" y="1054683"/>
-                  <a:pt x="4164182" y="1082286"/>
-                  <a:pt x="4033611" y="1074905"/>
-                </a:cubicBezTo>
-                <a:cubicBezTo>
-                  <a:pt x="3903040" y="1067524"/>
-                  <a:pt x="3401016" y="1069592"/>
-                  <a:pt x="3115617" y="1074905"/>
-                </a:cubicBezTo>
-                <a:cubicBezTo>
-                  <a:pt x="2830218" y="1080218"/>
-                  <a:pt x="2516429" y="1040037"/>
-                  <a:pt x="2197623" y="1074905"/>
-                </a:cubicBezTo>
-                <a:cubicBezTo>
-                  <a:pt x="1878817" y="1109773"/>
-                  <a:pt x="1654573" y="1095310"/>
-                  <a:pt x="1502173" y="1074905"/>
-                </a:cubicBezTo>
-                <a:cubicBezTo>
-                  <a:pt x="1349773" y="1054501"/>
-                  <a:pt x="1075836" y="1061315"/>
-                  <a:pt x="917994" y="1074905"/>
-                </a:cubicBezTo>
-                <a:cubicBezTo>
-                  <a:pt x="760152" y="1088495"/>
-                  <a:pt x="207300" y="1063789"/>
-                  <a:pt x="0" y="1074905"/>
-                </a:cubicBezTo>
-                <a:cubicBezTo>
-                  <a:pt x="-19422" y="866722"/>
-                  <a:pt x="-18832" y="646541"/>
-                  <a:pt x="0" y="526703"/>
-                </a:cubicBezTo>
-                <a:cubicBezTo>
-                  <a:pt x="18832" y="406865"/>
-                  <a:pt x="9390" y="175443"/>
-                  <a:pt x="0" y="0"/>
-                </a:cubicBezTo>
-                <a:close/>
-              </a:path>
-            </a:pathLst>
-          </a:custGeom>
-          <a:noFill/>
-          <a:ln>
-            <a:solidFill>
-              <a:schemeClr val="bg1"/>
-            </a:solidFill>
-            <a:extLst>
-              <a:ext uri="{C807C97D-BFC1-408E-A445-0C87EB9F89A2}">
-                <ask:lineSketchStyleProps xmlns:ask="http://schemas.microsoft.com/office/drawing/2018/sketchyshapes" sd="3065852334">
-                  <a:prstGeom prst="rect">
-                    <a:avLst/>
-                  </a:prstGeom>
-                  <ask:type>
-                    <ask:lineSketchFreehand/>
-                  </ask:type>
-                </ask:lineSketchStyleProps>
-              </a:ext>
-            </a:extLst>
-          </a:ln>
-        </p:spPr>
-        <p:txBody>
-          <a:bodyPr vert="horz" lIns="91440" tIns="45720" rIns="91440" bIns="45720" rtlCol="0" anchor="ctr">
-            <a:normAutofit/>
-          </a:bodyPr>
-          <a:lstStyle>
-            <a:lvl1pPr algn="l" defTabSz="914400" rtl="0" eaLnBrk="1" latinLnBrk="0" hangingPunct="1">
-              <a:lnSpc>
-                <a:spcPct val="90000"/>
-              </a:lnSpc>
-              <a:spcBef>
-                <a:spcPct val="0"/>
-              </a:spcBef>
-              <a:buNone/>
-              <a:defRPr sz="4400" kern="1200">
-                <a:solidFill>
-                  <a:schemeClr val="tx1"/>
-                </a:solidFill>
-                <a:latin typeface="+mj-lt"/>
-                <a:ea typeface="+mj-ea"/>
-                <a:cs typeface="+mj-cs"/>
-              </a:defRPr>
-            </a:lvl1pPr>
-          </a:lstStyle>
-          <a:p>
-            <a:pPr algn="ctr"/>
-            <a:r>
-              <a:rPr lang="hu-HU" dirty="0">
-                <a:solidFill>
-                  <a:schemeClr val="bg1"/>
-                </a:solidFill>
-              </a:rPr>
-              <a:t>Élő demó</a:t>
-            </a:r>
-          </a:p>
-        </p:txBody>
-      </p:sp>
-      <p:pic>
-        <p:nvPicPr>
-          <p:cNvPr id="2" name="Kép 1" descr="Discord Wordmark Color Logo PNG Vector">
-            <a:extLst>
-              <a:ext uri="{FF2B5EF4-FFF2-40B4-BE49-F238E27FC236}">
-                <a16:creationId xmlns:a16="http://schemas.microsoft.com/office/drawing/2014/main" id="{F2FE7C27-F2E2-3415-CAE1-07FF094CC96D}"/>
-              </a:ext>
-            </a:extLst>
-          </p:cNvPr>
-          <p:cNvPicPr>
-            <a:picLocks noChangeAspect="1"/>
-          </p:cNvPicPr>
-          <p:nvPr/>
-        </p:nvPicPr>
-        <p:blipFill>
-          <a:blip r:embed="rId3"/>
-          <a:srcRect t="36423" r="233" b="36364"/>
-          <a:stretch>
-            <a:fillRect/>
-          </a:stretch>
-        </p:blipFill>
-        <p:spPr>
-          <a:xfrm>
-            <a:off x="4127882" y="3326892"/>
-            <a:ext cx="3936243" cy="1073698"/>
-          </a:xfrm>
-          <a:custGeom>
-            <a:avLst/>
-            <a:gdLst>
-              <a:gd name="csX0" fmla="*/ 0 w 3936243"/>
-              <a:gd name="csY0" fmla="*/ 0 h 1073698"/>
-              <a:gd name="csX1" fmla="*/ 656041 w 3936243"/>
-              <a:gd name="csY1" fmla="*/ 0 h 1073698"/>
-              <a:gd name="csX2" fmla="*/ 1193994 w 3936243"/>
-              <a:gd name="csY2" fmla="*/ 0 h 1073698"/>
-              <a:gd name="csX3" fmla="*/ 1928759 w 3936243"/>
-              <a:gd name="csY3" fmla="*/ 0 h 1073698"/>
-              <a:gd name="csX4" fmla="*/ 2466712 w 3936243"/>
-              <a:gd name="csY4" fmla="*/ 0 h 1073698"/>
-              <a:gd name="csX5" fmla="*/ 3004665 w 3936243"/>
-              <a:gd name="csY5" fmla="*/ 0 h 1073698"/>
-              <a:gd name="csX6" fmla="*/ 3936243 w 3936243"/>
-              <a:gd name="csY6" fmla="*/ 0 h 1073698"/>
-              <a:gd name="csX7" fmla="*/ 3936243 w 3936243"/>
-              <a:gd name="csY7" fmla="*/ 547586 h 1073698"/>
-              <a:gd name="csX8" fmla="*/ 3936243 w 3936243"/>
-              <a:gd name="csY8" fmla="*/ 1073698 h 1073698"/>
-              <a:gd name="csX9" fmla="*/ 3240840 w 3936243"/>
-              <a:gd name="csY9" fmla="*/ 1073698 h 1073698"/>
-              <a:gd name="csX10" fmla="*/ 2584800 w 3936243"/>
-              <a:gd name="csY10" fmla="*/ 1073698 h 1073698"/>
-              <a:gd name="csX11" fmla="*/ 2046846 w 3936243"/>
-              <a:gd name="csY11" fmla="*/ 1073698 h 1073698"/>
-              <a:gd name="csX12" fmla="*/ 1430168 w 3936243"/>
-              <a:gd name="csY12" fmla="*/ 1073698 h 1073698"/>
-              <a:gd name="csX13" fmla="*/ 813490 w 3936243"/>
-              <a:gd name="csY13" fmla="*/ 1073698 h 1073698"/>
-              <a:gd name="csX14" fmla="*/ 0 w 3936243"/>
-              <a:gd name="csY14" fmla="*/ 1073698 h 1073698"/>
-              <a:gd name="csX15" fmla="*/ 0 w 3936243"/>
-              <a:gd name="csY15" fmla="*/ 547586 h 1073698"/>
-              <a:gd name="csX16" fmla="*/ 0 w 3936243"/>
-              <a:gd name="csY16" fmla="*/ 0 h 1073698"/>
-            </a:gdLst>
-            <a:ahLst/>
-            <a:cxnLst>
-              <a:cxn ang="0">
-                <a:pos x="csX0" y="csY0"/>
-              </a:cxn>
-              <a:cxn ang="0">
-                <a:pos x="csX1" y="csY1"/>
-              </a:cxn>
-              <a:cxn ang="0">
-                <a:pos x="csX2" y="csY2"/>
-              </a:cxn>
-              <a:cxn ang="0">
-                <a:pos x="csX3" y="csY3"/>
-              </a:cxn>
-              <a:cxn ang="0">
-                <a:pos x="csX4" y="csY4"/>
-              </a:cxn>
-              <a:cxn ang="0">
-                <a:pos x="csX5" y="csY5"/>
-              </a:cxn>
-              <a:cxn ang="0">
-                <a:pos x="csX6" y="csY6"/>
-              </a:cxn>
-              <a:cxn ang="0">
-                <a:pos x="csX7" y="csY7"/>
-              </a:cxn>
-              <a:cxn ang="0">
-                <a:pos x="csX8" y="csY8"/>
-              </a:cxn>
-              <a:cxn ang="0">
-                <a:pos x="csX9" y="csY9"/>
-              </a:cxn>
-              <a:cxn ang="0">
-                <a:pos x="csX10" y="csY10"/>
-              </a:cxn>
-              <a:cxn ang="0">
-                <a:pos x="csX11" y="csY11"/>
-              </a:cxn>
-              <a:cxn ang="0">
-                <a:pos x="csX12" y="csY12"/>
-              </a:cxn>
-              <a:cxn ang="0">
-                <a:pos x="csX13" y="csY13"/>
-              </a:cxn>
-              <a:cxn ang="0">
-                <a:pos x="csX14" y="csY14"/>
-              </a:cxn>
-              <a:cxn ang="0">
-                <a:pos x="csX15" y="csY15"/>
-              </a:cxn>
-              <a:cxn ang="0">
-                <a:pos x="csX16" y="csY16"/>
-              </a:cxn>
-            </a:cxnLst>
-            <a:rect l="l" t="t" r="r" b="b"/>
-            <a:pathLst>
-              <a:path w="3936243" h="1073698" fill="none" extrusionOk="0">
-                <a:moveTo>
-                  <a:pt x="0" y="0"/>
-                </a:moveTo>
-                <a:cubicBezTo>
-                  <a:pt x="229008" y="-6596"/>
-                  <a:pt x="421359" y="-25725"/>
-                  <a:pt x="656041" y="0"/>
-                </a:cubicBezTo>
-                <a:cubicBezTo>
-                  <a:pt x="890723" y="25725"/>
-                  <a:pt x="1046388" y="-4705"/>
-                  <a:pt x="1193994" y="0"/>
-                </a:cubicBezTo>
-                <a:cubicBezTo>
-                  <a:pt x="1341600" y="4705"/>
-                  <a:pt x="1698115" y="21474"/>
-                  <a:pt x="1928759" y="0"/>
-                </a:cubicBezTo>
-                <a:cubicBezTo>
-                  <a:pt x="2159404" y="-21474"/>
-                  <a:pt x="2314326" y="5089"/>
-                  <a:pt x="2466712" y="0"/>
-                </a:cubicBezTo>
-                <a:cubicBezTo>
-                  <a:pt x="2619098" y="-5089"/>
-                  <a:pt x="2737336" y="-5982"/>
-                  <a:pt x="3004665" y="0"/>
-                </a:cubicBezTo>
-                <a:cubicBezTo>
-                  <a:pt x="3271994" y="5982"/>
-                  <a:pt x="3666966" y="-17247"/>
-                  <a:pt x="3936243" y="0"/>
-                </a:cubicBezTo>
-                <a:cubicBezTo>
-                  <a:pt x="3942330" y="251350"/>
-                  <a:pt x="3951844" y="314615"/>
-                  <a:pt x="3936243" y="547586"/>
-                </a:cubicBezTo>
-                <a:cubicBezTo>
-                  <a:pt x="3920642" y="780557"/>
-                  <a:pt x="3921598" y="905819"/>
-                  <a:pt x="3936243" y="1073698"/>
-                </a:cubicBezTo>
-                <a:cubicBezTo>
-                  <a:pt x="3787402" y="1060124"/>
-                  <a:pt x="3522706" y="1041171"/>
-                  <a:pt x="3240840" y="1073698"/>
-                </a:cubicBezTo>
-                <a:cubicBezTo>
-                  <a:pt x="2958974" y="1106225"/>
-                  <a:pt x="2903055" y="1071075"/>
-                  <a:pt x="2584800" y="1073698"/>
-                </a:cubicBezTo>
-                <a:cubicBezTo>
-                  <a:pt x="2266545" y="1076321"/>
-                  <a:pt x="2238007" y="1099317"/>
-                  <a:pt x="2046846" y="1073698"/>
-                </a:cubicBezTo>
-                <a:cubicBezTo>
-                  <a:pt x="1855685" y="1048079"/>
-                  <a:pt x="1586315" y="1104315"/>
-                  <a:pt x="1430168" y="1073698"/>
-                </a:cubicBezTo>
-                <a:cubicBezTo>
-                  <a:pt x="1274021" y="1043081"/>
-                  <a:pt x="1085446" y="1078857"/>
-                  <a:pt x="813490" y="1073698"/>
-                </a:cubicBezTo>
-                <a:cubicBezTo>
-                  <a:pt x="541534" y="1068539"/>
-                  <a:pt x="222912" y="1077648"/>
-                  <a:pt x="0" y="1073698"/>
-                </a:cubicBezTo>
-                <a:cubicBezTo>
-                  <a:pt x="-15506" y="926964"/>
-                  <a:pt x="10291" y="727155"/>
-                  <a:pt x="0" y="547586"/>
-                </a:cubicBezTo>
-                <a:cubicBezTo>
-                  <a:pt x="-10291" y="368017"/>
-                  <a:pt x="10122" y="127800"/>
-                  <a:pt x="0" y="0"/>
-                </a:cubicBezTo>
-                <a:close/>
-              </a:path>
-              <a:path w="3936243" h="1073698" stroke="0" extrusionOk="0">
-                <a:moveTo>
-                  <a:pt x="0" y="0"/>
-                </a:moveTo>
-                <a:cubicBezTo>
-                  <a:pt x="209543" y="-5943"/>
-                  <a:pt x="334955" y="-14925"/>
-                  <a:pt x="537953" y="0"/>
-                </a:cubicBezTo>
-                <a:cubicBezTo>
-                  <a:pt x="740951" y="14925"/>
-                  <a:pt x="913657" y="21530"/>
-                  <a:pt x="1272719" y="0"/>
-                </a:cubicBezTo>
-                <a:cubicBezTo>
-                  <a:pt x="1631781" y="-21530"/>
-                  <a:pt x="1617082" y="-13450"/>
-                  <a:pt x="1928759" y="0"/>
-                </a:cubicBezTo>
-                <a:cubicBezTo>
-                  <a:pt x="2240436" y="13450"/>
-                  <a:pt x="2256910" y="20857"/>
-                  <a:pt x="2506075" y="0"/>
-                </a:cubicBezTo>
-                <a:cubicBezTo>
-                  <a:pt x="2755240" y="-20857"/>
-                  <a:pt x="2889232" y="10903"/>
-                  <a:pt x="3162115" y="0"/>
-                </a:cubicBezTo>
-                <a:cubicBezTo>
-                  <a:pt x="3434998" y="-10903"/>
-                  <a:pt x="3726666" y="-17797"/>
-                  <a:pt x="3936243" y="0"/>
-                </a:cubicBezTo>
-                <a:cubicBezTo>
-                  <a:pt x="3934998" y="256299"/>
-                  <a:pt x="3917281" y="302288"/>
-                  <a:pt x="3936243" y="547586"/>
-                </a:cubicBezTo>
-                <a:cubicBezTo>
-                  <a:pt x="3955205" y="792884"/>
-                  <a:pt x="3961278" y="963504"/>
-                  <a:pt x="3936243" y="1073698"/>
-                </a:cubicBezTo>
-                <a:cubicBezTo>
-                  <a:pt x="3691480" y="1088548"/>
-                  <a:pt x="3413635" y="1064605"/>
-                  <a:pt x="3201478" y="1073698"/>
-                </a:cubicBezTo>
-                <a:cubicBezTo>
-                  <a:pt x="2989322" y="1082791"/>
-                  <a:pt x="2871424" y="1095707"/>
-                  <a:pt x="2545437" y="1073698"/>
-                </a:cubicBezTo>
-                <a:cubicBezTo>
-                  <a:pt x="2219450" y="1051689"/>
-                  <a:pt x="2028034" y="1074229"/>
-                  <a:pt x="1850034" y="1073698"/>
-                </a:cubicBezTo>
-                <a:cubicBezTo>
-                  <a:pt x="1672034" y="1073167"/>
-                  <a:pt x="1325799" y="1099150"/>
-                  <a:pt x="1154631" y="1073698"/>
-                </a:cubicBezTo>
-                <a:cubicBezTo>
-                  <a:pt x="983463" y="1048246"/>
-                  <a:pt x="502528" y="1104143"/>
-                  <a:pt x="0" y="1073698"/>
-                </a:cubicBezTo>
-                <a:cubicBezTo>
-                  <a:pt x="1242" y="847404"/>
-                  <a:pt x="-20210" y="775475"/>
-                  <a:pt x="0" y="515375"/>
-                </a:cubicBezTo>
-                <a:cubicBezTo>
-                  <a:pt x="20210" y="255275"/>
-                  <a:pt x="-1812" y="163320"/>
-                  <a:pt x="0" y="0"/>
-                </a:cubicBezTo>
-                <a:close/>
-              </a:path>
-            </a:pathLst>
-          </a:custGeom>
-          <a:ln w="57150">
-            <a:solidFill>
-              <a:schemeClr val="tx1"/>
-            </a:solidFill>
-            <a:extLst>
-              <a:ext uri="{C807C97D-BFC1-408E-A445-0C87EB9F89A2}">
-                <ask:lineSketchStyleProps xmlns:ask="http://schemas.microsoft.com/office/drawing/2018/sketchyshapes" sd="3377342847">
-                  <a:prstGeom prst="rect">
-                    <a:avLst/>
-                  </a:prstGeom>
-                  <ask:type>
-                    <ask:lineSketchFreehand/>
-                  </ask:type>
-                </ask:lineSketchStyleProps>
-              </a:ext>
-            </a:extLst>
-          </a:ln>
-        </p:spPr>
-      </p:pic>
-    </p:spTree>
-    <p:extLst>
-      <p:ext uri="{BB962C8B-B14F-4D97-AF65-F5344CB8AC3E}">
-        <p14:creationId xmlns:p14="http://schemas.microsoft.com/office/powerpoint/2010/main" val="2094377966"/>
-      </p:ext>
-    </p:extLst>
-  </p:cSld>
-  <p:clrMapOvr>
-    <a:masterClrMapping/>
-  </p:clrMapOvr>
-  <mc:AlternateContent xmlns:mc="http://schemas.openxmlformats.org/markup-compatibility/2006" xmlns:p14="http://schemas.microsoft.com/office/powerpoint/2010/main">
-    <mc:Choice Requires="p14">
-      <p:transition spd="slow" p14:dur="1300">
-        <p14:pan dir="u"/>
-      </p:transition>
-    </mc:Choice>
-    <mc:Fallback xmlns="">
-      <p:transition spd="slow">
-        <p:fade/>
-      </p:transition>
-    </mc:Fallback>
-  </mc:AlternateContent>
-</p:sld>
-</file>
-
-<file path=ppt/slides/slide11.xml><?xml version="1.0" encoding="utf-8"?>
 <p:sld xmlns:a="http://schemas.openxmlformats.org/drawingml/2006/main" xmlns:r="http://schemas.openxmlformats.org/officeDocument/2006/relationships" xmlns:p="http://schemas.openxmlformats.org/presentationml/2006/main">
   <p:cSld>
     <p:bg>
@@ -4837,7 +3918,7 @@
 </p:sld>
 </file>
 
-<file path=ppt/slides/slide12.xml><?xml version="1.0" encoding="utf-8"?>
+<file path=ppt/slides/slide11.xml><?xml version="1.0" encoding="utf-8"?>
 <p:sld xmlns:a="http://schemas.openxmlformats.org/drawingml/2006/main" xmlns:r="http://schemas.openxmlformats.org/officeDocument/2006/relationships" xmlns:p="http://schemas.openxmlformats.org/presentationml/2006/main">
   <p:cSld>
     <p:bg>
@@ -5832,11 +4913,6 @@
               </a:rPr>
               <a:t>Csapatunk</a:t>
             </a:r>
-            <a:endParaRPr lang="hu-HU" b="1">
-              <a:solidFill>
-                <a:schemeClr val="bg1"/>
-              </a:solidFill>
-            </a:endParaRPr>
           </a:p>
         </p:txBody>
       </p:sp>
@@ -7201,1501 +6277,6 @@
         <a:blipFill>
           <a:blip r:embed="rId2"/>
           <a:stretch>
-            <a:fillRect t="-2000" b="-2000"/>
-          </a:stretch>
-        </a:blipFill>
-        <a:effectLst/>
-      </p:bgPr>
-    </p:bg>
-    <p:spTree>
-      <p:nvGrpSpPr>
-        <p:cNvPr id="1" name="">
-          <a:extLst>
-            <a:ext uri="{FF2B5EF4-FFF2-40B4-BE49-F238E27FC236}">
-              <a16:creationId xmlns:a16="http://schemas.microsoft.com/office/drawing/2014/main" id="{112880DC-3D55-1D7C-7FF3-B5DDA601C42A}"/>
-            </a:ext>
-          </a:extLst>
-        </p:cNvPr>
-        <p:cNvGrpSpPr/>
-        <p:nvPr/>
-      </p:nvGrpSpPr>
-      <p:grpSpPr>
-        <a:xfrm>
-          <a:off x="0" y="0"/>
-          <a:ext cx="0" cy="0"/>
-          <a:chOff x="0" y="0"/>
-          <a:chExt cx="0" cy="0"/>
-        </a:xfrm>
-      </p:grpSpPr>
-      <p:sp>
-        <p:nvSpPr>
-          <p:cNvPr id="2" name="Cím 1">
-            <a:extLst>
-              <a:ext uri="{FF2B5EF4-FFF2-40B4-BE49-F238E27FC236}">
-                <a16:creationId xmlns:a16="http://schemas.microsoft.com/office/drawing/2014/main" id="{97AE7EF1-4D2D-EB98-C7DC-9A858EB5B4E6}"/>
-              </a:ext>
-            </a:extLst>
-          </p:cNvPr>
-          <p:cNvSpPr>
-            <a:spLocks noGrp="1"/>
-          </p:cNvSpPr>
-          <p:nvPr>
-            <p:ph type="title"/>
-          </p:nvPr>
-        </p:nvSpPr>
-        <p:spPr>
-          <a:xfrm>
-            <a:off x="687806" y="164599"/>
-            <a:ext cx="11127204" cy="1074905"/>
-          </a:xfrm>
-          <a:custGeom>
-            <a:avLst/>
-            <a:gdLst>
-              <a:gd name="csX0" fmla="*/ 0 w 11127204"/>
-              <a:gd name="csY0" fmla="*/ 0 h 1074905"/>
-              <a:gd name="csX1" fmla="*/ 472906 w 11127204"/>
-              <a:gd name="csY1" fmla="*/ 0 h 1074905"/>
-              <a:gd name="csX2" fmla="*/ 834540 w 11127204"/>
-              <a:gd name="csY2" fmla="*/ 0 h 1074905"/>
-              <a:gd name="csX3" fmla="*/ 1641263 w 11127204"/>
-              <a:gd name="csY3" fmla="*/ 0 h 1074905"/>
-              <a:gd name="csX4" fmla="*/ 2559257 w 11127204"/>
-              <a:gd name="csY4" fmla="*/ 0 h 1074905"/>
-              <a:gd name="csX5" fmla="*/ 2920891 w 11127204"/>
-              <a:gd name="csY5" fmla="*/ 0 h 1074905"/>
-              <a:gd name="csX6" fmla="*/ 3838885 w 11127204"/>
-              <a:gd name="csY6" fmla="*/ 0 h 1074905"/>
-              <a:gd name="csX7" fmla="*/ 4423064 w 11127204"/>
-              <a:gd name="csY7" fmla="*/ 0 h 1074905"/>
-              <a:gd name="csX8" fmla="*/ 4895970 w 11127204"/>
-              <a:gd name="csY8" fmla="*/ 0 h 1074905"/>
-              <a:gd name="csX9" fmla="*/ 5368876 w 11127204"/>
-              <a:gd name="csY9" fmla="*/ 0 h 1074905"/>
-              <a:gd name="csX10" fmla="*/ 6064326 w 11127204"/>
-              <a:gd name="csY10" fmla="*/ 0 h 1074905"/>
-              <a:gd name="csX11" fmla="*/ 6871048 w 11127204"/>
-              <a:gd name="csY11" fmla="*/ 0 h 1074905"/>
-              <a:gd name="csX12" fmla="*/ 7789043 w 11127204"/>
-              <a:gd name="csY12" fmla="*/ 0 h 1074905"/>
-              <a:gd name="csX13" fmla="*/ 8707037 w 11127204"/>
-              <a:gd name="csY13" fmla="*/ 0 h 1074905"/>
-              <a:gd name="csX14" fmla="*/ 9513759 w 11127204"/>
-              <a:gd name="csY14" fmla="*/ 0 h 1074905"/>
-              <a:gd name="csX15" fmla="*/ 9986666 w 11127204"/>
-              <a:gd name="csY15" fmla="*/ 0 h 1074905"/>
-              <a:gd name="csX16" fmla="*/ 10459572 w 11127204"/>
-              <a:gd name="csY16" fmla="*/ 0 h 1074905"/>
-              <a:gd name="csX17" fmla="*/ 11127204 w 11127204"/>
-              <a:gd name="csY17" fmla="*/ 0 h 1074905"/>
-              <a:gd name="csX18" fmla="*/ 11127204 w 11127204"/>
-              <a:gd name="csY18" fmla="*/ 548202 h 1074905"/>
-              <a:gd name="csX19" fmla="*/ 11127204 w 11127204"/>
-              <a:gd name="csY19" fmla="*/ 1074905 h 1074905"/>
-              <a:gd name="csX20" fmla="*/ 10320482 w 11127204"/>
-              <a:gd name="csY20" fmla="*/ 1074905 h 1074905"/>
-              <a:gd name="csX21" fmla="*/ 9625031 w 11127204"/>
-              <a:gd name="csY21" fmla="*/ 1074905 h 1074905"/>
-              <a:gd name="csX22" fmla="*/ 8929581 w 11127204"/>
-              <a:gd name="csY22" fmla="*/ 1074905 h 1074905"/>
-              <a:gd name="csX23" fmla="*/ 8234131 w 11127204"/>
-              <a:gd name="csY23" fmla="*/ 1074905 h 1074905"/>
-              <a:gd name="csX24" fmla="*/ 7761225 w 11127204"/>
-              <a:gd name="csY24" fmla="*/ 1074905 h 1074905"/>
-              <a:gd name="csX25" fmla="*/ 6843230 w 11127204"/>
-              <a:gd name="csY25" fmla="*/ 1074905 h 1074905"/>
-              <a:gd name="csX26" fmla="*/ 6370324 w 11127204"/>
-              <a:gd name="csY26" fmla="*/ 1074905 h 1074905"/>
-              <a:gd name="csX27" fmla="*/ 6008690 w 11127204"/>
-              <a:gd name="csY27" fmla="*/ 1074905 h 1074905"/>
-              <a:gd name="csX28" fmla="*/ 5090696 w 11127204"/>
-              <a:gd name="csY28" fmla="*/ 1074905 h 1074905"/>
-              <a:gd name="csX29" fmla="*/ 4617790 w 11127204"/>
-              <a:gd name="csY29" fmla="*/ 1074905 h 1074905"/>
-              <a:gd name="csX30" fmla="*/ 4033611 w 11127204"/>
-              <a:gd name="csY30" fmla="*/ 1074905 h 1074905"/>
-              <a:gd name="csX31" fmla="*/ 3115617 w 11127204"/>
-              <a:gd name="csY31" fmla="*/ 1074905 h 1074905"/>
-              <a:gd name="csX32" fmla="*/ 2197623 w 11127204"/>
-              <a:gd name="csY32" fmla="*/ 1074905 h 1074905"/>
-              <a:gd name="csX33" fmla="*/ 1502173 w 11127204"/>
-              <a:gd name="csY33" fmla="*/ 1074905 h 1074905"/>
-              <a:gd name="csX34" fmla="*/ 917994 w 11127204"/>
-              <a:gd name="csY34" fmla="*/ 1074905 h 1074905"/>
-              <a:gd name="csX35" fmla="*/ 0 w 11127204"/>
-              <a:gd name="csY35" fmla="*/ 1074905 h 1074905"/>
-              <a:gd name="csX36" fmla="*/ 0 w 11127204"/>
-              <a:gd name="csY36" fmla="*/ 526703 h 1074905"/>
-              <a:gd name="csX37" fmla="*/ 0 w 11127204"/>
-              <a:gd name="csY37" fmla="*/ 0 h 1074905"/>
-            </a:gdLst>
-            <a:ahLst/>
-            <a:cxnLst>
-              <a:cxn ang="0">
-                <a:pos x="csX0" y="csY0"/>
-              </a:cxn>
-              <a:cxn ang="0">
-                <a:pos x="csX1" y="csY1"/>
-              </a:cxn>
-              <a:cxn ang="0">
-                <a:pos x="csX2" y="csY2"/>
-              </a:cxn>
-              <a:cxn ang="0">
-                <a:pos x="csX3" y="csY3"/>
-              </a:cxn>
-              <a:cxn ang="0">
-                <a:pos x="csX4" y="csY4"/>
-              </a:cxn>
-              <a:cxn ang="0">
-                <a:pos x="csX5" y="csY5"/>
-              </a:cxn>
-              <a:cxn ang="0">
-                <a:pos x="csX6" y="csY6"/>
-              </a:cxn>
-              <a:cxn ang="0">
-                <a:pos x="csX7" y="csY7"/>
-              </a:cxn>
-              <a:cxn ang="0">
-                <a:pos x="csX8" y="csY8"/>
-              </a:cxn>
-              <a:cxn ang="0">
-                <a:pos x="csX9" y="csY9"/>
-              </a:cxn>
-              <a:cxn ang="0">
-                <a:pos x="csX10" y="csY10"/>
-              </a:cxn>
-              <a:cxn ang="0">
-                <a:pos x="csX11" y="csY11"/>
-              </a:cxn>
-              <a:cxn ang="0">
-                <a:pos x="csX12" y="csY12"/>
-              </a:cxn>
-              <a:cxn ang="0">
-                <a:pos x="csX13" y="csY13"/>
-              </a:cxn>
-              <a:cxn ang="0">
-                <a:pos x="csX14" y="csY14"/>
-              </a:cxn>
-              <a:cxn ang="0">
-                <a:pos x="csX15" y="csY15"/>
-              </a:cxn>
-              <a:cxn ang="0">
-                <a:pos x="csX16" y="csY16"/>
-              </a:cxn>
-              <a:cxn ang="0">
-                <a:pos x="csX17" y="csY17"/>
-              </a:cxn>
-              <a:cxn ang="0">
-                <a:pos x="csX18" y="csY18"/>
-              </a:cxn>
-              <a:cxn ang="0">
-                <a:pos x="csX19" y="csY19"/>
-              </a:cxn>
-              <a:cxn ang="0">
-                <a:pos x="csX20" y="csY20"/>
-              </a:cxn>
-              <a:cxn ang="0">
-                <a:pos x="csX21" y="csY21"/>
-              </a:cxn>
-              <a:cxn ang="0">
-                <a:pos x="csX22" y="csY22"/>
-              </a:cxn>
-              <a:cxn ang="0">
-                <a:pos x="csX23" y="csY23"/>
-              </a:cxn>
-              <a:cxn ang="0">
-                <a:pos x="csX24" y="csY24"/>
-              </a:cxn>
-              <a:cxn ang="0">
-                <a:pos x="csX25" y="csY25"/>
-              </a:cxn>
-              <a:cxn ang="0">
-                <a:pos x="csX26" y="csY26"/>
-              </a:cxn>
-              <a:cxn ang="0">
-                <a:pos x="csX27" y="csY27"/>
-              </a:cxn>
-              <a:cxn ang="0">
-                <a:pos x="csX28" y="csY28"/>
-              </a:cxn>
-              <a:cxn ang="0">
-                <a:pos x="csX29" y="csY29"/>
-              </a:cxn>
-              <a:cxn ang="0">
-                <a:pos x="csX30" y="csY30"/>
-              </a:cxn>
-              <a:cxn ang="0">
-                <a:pos x="csX31" y="csY31"/>
-              </a:cxn>
-              <a:cxn ang="0">
-                <a:pos x="csX32" y="csY32"/>
-              </a:cxn>
-              <a:cxn ang="0">
-                <a:pos x="csX33" y="csY33"/>
-              </a:cxn>
-              <a:cxn ang="0">
-                <a:pos x="csX34" y="csY34"/>
-              </a:cxn>
-              <a:cxn ang="0">
-                <a:pos x="csX35" y="csY35"/>
-              </a:cxn>
-              <a:cxn ang="0">
-                <a:pos x="csX36" y="csY36"/>
-              </a:cxn>
-              <a:cxn ang="0">
-                <a:pos x="csX37" y="csY37"/>
-              </a:cxn>
-            </a:cxnLst>
-            <a:rect l="l" t="t" r="r" b="b"/>
-            <a:pathLst>
-              <a:path w="11127204" h="1074905" extrusionOk="0">
-                <a:moveTo>
-                  <a:pt x="0" y="0"/>
-                </a:moveTo>
-                <a:cubicBezTo>
-                  <a:pt x="173725" y="7780"/>
-                  <a:pt x="362577" y="-18298"/>
-                  <a:pt x="472906" y="0"/>
-                </a:cubicBezTo>
-                <a:cubicBezTo>
-                  <a:pt x="583235" y="18298"/>
-                  <a:pt x="701416" y="-12323"/>
-                  <a:pt x="834540" y="0"/>
-                </a:cubicBezTo>
-                <a:cubicBezTo>
-                  <a:pt x="967664" y="12323"/>
-                  <a:pt x="1357309" y="36907"/>
-                  <a:pt x="1641263" y="0"/>
-                </a:cubicBezTo>
-                <a:cubicBezTo>
-                  <a:pt x="1925217" y="-36907"/>
-                  <a:pt x="2142541" y="27510"/>
-                  <a:pt x="2559257" y="0"/>
-                </a:cubicBezTo>
-                <a:cubicBezTo>
-                  <a:pt x="2975973" y="-27510"/>
-                  <a:pt x="2747929" y="-15189"/>
-                  <a:pt x="2920891" y="0"/>
-                </a:cubicBezTo>
-                <a:cubicBezTo>
-                  <a:pt x="3093853" y="15189"/>
-                  <a:pt x="3648561" y="-25584"/>
-                  <a:pt x="3838885" y="0"/>
-                </a:cubicBezTo>
-                <a:cubicBezTo>
-                  <a:pt x="4029209" y="25584"/>
-                  <a:pt x="4232161" y="-20498"/>
-                  <a:pt x="4423064" y="0"/>
-                </a:cubicBezTo>
-                <a:cubicBezTo>
-                  <a:pt x="4613967" y="20498"/>
-                  <a:pt x="4797039" y="-13016"/>
-                  <a:pt x="4895970" y="0"/>
-                </a:cubicBezTo>
-                <a:cubicBezTo>
-                  <a:pt x="4994901" y="13016"/>
-                  <a:pt x="5174223" y="21709"/>
-                  <a:pt x="5368876" y="0"/>
-                </a:cubicBezTo>
-                <a:cubicBezTo>
-                  <a:pt x="5563529" y="-21709"/>
-                  <a:pt x="5723187" y="-7574"/>
-                  <a:pt x="6064326" y="0"/>
-                </a:cubicBezTo>
-                <a:cubicBezTo>
-                  <a:pt x="6405465" y="7574"/>
-                  <a:pt x="6468590" y="12486"/>
-                  <a:pt x="6871048" y="0"/>
-                </a:cubicBezTo>
-                <a:cubicBezTo>
-                  <a:pt x="7273506" y="-12486"/>
-                  <a:pt x="7424074" y="-45380"/>
-                  <a:pt x="7789043" y="0"/>
-                </a:cubicBezTo>
-                <a:cubicBezTo>
-                  <a:pt x="8154013" y="45380"/>
-                  <a:pt x="8439666" y="-39445"/>
-                  <a:pt x="8707037" y="0"/>
-                </a:cubicBezTo>
-                <a:cubicBezTo>
-                  <a:pt x="8974408" y="39445"/>
-                  <a:pt x="9147635" y="-12593"/>
-                  <a:pt x="9513759" y="0"/>
-                </a:cubicBezTo>
-                <a:cubicBezTo>
-                  <a:pt x="9879883" y="12593"/>
-                  <a:pt x="9815420" y="1717"/>
-                  <a:pt x="9986666" y="0"/>
-                </a:cubicBezTo>
-                <a:cubicBezTo>
-                  <a:pt x="10157912" y="-1717"/>
-                  <a:pt x="10254876" y="17543"/>
-                  <a:pt x="10459572" y="0"/>
-                </a:cubicBezTo>
-                <a:cubicBezTo>
-                  <a:pt x="10664268" y="-17543"/>
-                  <a:pt x="10968587" y="-18155"/>
-                  <a:pt x="11127204" y="0"/>
-                </a:cubicBezTo>
-                <a:cubicBezTo>
-                  <a:pt x="11134549" y="148727"/>
-                  <a:pt x="11147386" y="365366"/>
-                  <a:pt x="11127204" y="548202"/>
-                </a:cubicBezTo>
-                <a:cubicBezTo>
-                  <a:pt x="11107022" y="731038"/>
-                  <a:pt x="11147208" y="823314"/>
-                  <a:pt x="11127204" y="1074905"/>
-                </a:cubicBezTo>
-                <a:cubicBezTo>
-                  <a:pt x="10926449" y="1108939"/>
-                  <a:pt x="10643626" y="1100935"/>
-                  <a:pt x="10320482" y="1074905"/>
-                </a:cubicBezTo>
-                <a:cubicBezTo>
-                  <a:pt x="9997338" y="1048875"/>
-                  <a:pt x="9798690" y="1079340"/>
-                  <a:pt x="9625031" y="1074905"/>
-                </a:cubicBezTo>
-                <a:cubicBezTo>
-                  <a:pt x="9451372" y="1070470"/>
-                  <a:pt x="9260205" y="1063922"/>
-                  <a:pt x="8929581" y="1074905"/>
-                </a:cubicBezTo>
-                <a:cubicBezTo>
-                  <a:pt x="8598957" y="1085889"/>
-                  <a:pt x="8387884" y="1088107"/>
-                  <a:pt x="8234131" y="1074905"/>
-                </a:cubicBezTo>
-                <a:cubicBezTo>
-                  <a:pt x="8080378" y="1061704"/>
-                  <a:pt x="7968841" y="1065103"/>
-                  <a:pt x="7761225" y="1074905"/>
-                </a:cubicBezTo>
-                <a:cubicBezTo>
-                  <a:pt x="7553609" y="1084707"/>
-                  <a:pt x="7173541" y="1103906"/>
-                  <a:pt x="6843230" y="1074905"/>
-                </a:cubicBezTo>
-                <a:cubicBezTo>
-                  <a:pt x="6512920" y="1045904"/>
-                  <a:pt x="6495232" y="1055676"/>
-                  <a:pt x="6370324" y="1074905"/>
-                </a:cubicBezTo>
-                <a:cubicBezTo>
-                  <a:pt x="6245416" y="1094134"/>
-                  <a:pt x="6176547" y="1056994"/>
-                  <a:pt x="6008690" y="1074905"/>
-                </a:cubicBezTo>
-                <a:cubicBezTo>
-                  <a:pt x="5840833" y="1092816"/>
-                  <a:pt x="5316460" y="1053272"/>
-                  <a:pt x="5090696" y="1074905"/>
-                </a:cubicBezTo>
-                <a:cubicBezTo>
-                  <a:pt x="4864932" y="1096538"/>
-                  <a:pt x="4824564" y="1095127"/>
-                  <a:pt x="4617790" y="1074905"/>
-                </a:cubicBezTo>
-                <a:cubicBezTo>
-                  <a:pt x="4411016" y="1054683"/>
-                  <a:pt x="4164182" y="1082286"/>
-                  <a:pt x="4033611" y="1074905"/>
-                </a:cubicBezTo>
-                <a:cubicBezTo>
-                  <a:pt x="3903040" y="1067524"/>
-                  <a:pt x="3401016" y="1069592"/>
-                  <a:pt x="3115617" y="1074905"/>
-                </a:cubicBezTo>
-                <a:cubicBezTo>
-                  <a:pt x="2830218" y="1080218"/>
-                  <a:pt x="2516429" y="1040037"/>
-                  <a:pt x="2197623" y="1074905"/>
-                </a:cubicBezTo>
-                <a:cubicBezTo>
-                  <a:pt x="1878817" y="1109773"/>
-                  <a:pt x="1654573" y="1095310"/>
-                  <a:pt x="1502173" y="1074905"/>
-                </a:cubicBezTo>
-                <a:cubicBezTo>
-                  <a:pt x="1349773" y="1054501"/>
-                  <a:pt x="1075836" y="1061315"/>
-                  <a:pt x="917994" y="1074905"/>
-                </a:cubicBezTo>
-                <a:cubicBezTo>
-                  <a:pt x="760152" y="1088495"/>
-                  <a:pt x="207300" y="1063789"/>
-                  <a:pt x="0" y="1074905"/>
-                </a:cubicBezTo>
-                <a:cubicBezTo>
-                  <a:pt x="-19422" y="866722"/>
-                  <a:pt x="-18832" y="646541"/>
-                  <a:pt x="0" y="526703"/>
-                </a:cubicBezTo>
-                <a:cubicBezTo>
-                  <a:pt x="18832" y="406865"/>
-                  <a:pt x="9390" y="175443"/>
-                  <a:pt x="0" y="0"/>
-                </a:cubicBezTo>
-                <a:close/>
-              </a:path>
-            </a:pathLst>
-          </a:custGeom>
-          <a:noFill/>
-          <a:ln>
-            <a:solidFill>
-              <a:schemeClr val="bg1"/>
-            </a:solidFill>
-            <a:extLst>
-              <a:ext uri="{C807C97D-BFC1-408E-A445-0C87EB9F89A2}">
-                <ask:lineSketchStyleProps xmlns:ask="http://schemas.microsoft.com/office/drawing/2018/sketchyshapes" sd="3065852334">
-                  <ask:type>
-                    <ask:lineSketchFreehand/>
-                  </ask:type>
-                </ask:lineSketchStyleProps>
-              </a:ext>
-            </a:extLst>
-          </a:ln>
-        </p:spPr>
-        <p:txBody>
-          <a:bodyPr/>
-          <a:lstStyle/>
-          <a:p>
-            <a:pPr algn="ctr"/>
-            <a:r>
-              <a:rPr lang="hu-HU" b="1" dirty="0">
-                <a:solidFill>
-                  <a:schemeClr val="bg1"/>
-                </a:solidFill>
-              </a:rPr>
-              <a:t>Csapatunk</a:t>
-            </a:r>
-            <a:endParaRPr lang="hu-HU" b="1">
-              <a:solidFill>
-                <a:schemeClr val="bg1"/>
-              </a:solidFill>
-            </a:endParaRPr>
-          </a:p>
-        </p:txBody>
-      </p:sp>
-      <p:sp>
-        <p:nvSpPr>
-          <p:cNvPr id="3" name="Tartalom helye 2">
-            <a:extLst>
-              <a:ext uri="{FF2B5EF4-FFF2-40B4-BE49-F238E27FC236}">
-                <a16:creationId xmlns:a16="http://schemas.microsoft.com/office/drawing/2014/main" id="{13B741F5-682C-146F-7033-B67EE94443EA}"/>
-              </a:ext>
-            </a:extLst>
-          </p:cNvPr>
-          <p:cNvSpPr>
-            <a:spLocks noGrp="1"/>
-          </p:cNvSpPr>
-          <p:nvPr>
-            <p:ph idx="1"/>
-          </p:nvPr>
-        </p:nvSpPr>
-        <p:spPr>
-          <a:xfrm>
-            <a:off x="687805" y="2016126"/>
-            <a:ext cx="4188994" cy="1754523"/>
-          </a:xfrm>
-          <a:custGeom>
-            <a:avLst/>
-            <a:gdLst>
-              <a:gd name="csX0" fmla="*/ 0 w 4188994"/>
-              <a:gd name="csY0" fmla="*/ 0 h 1754523"/>
-              <a:gd name="csX1" fmla="*/ 781946 w 4188994"/>
-              <a:gd name="csY1" fmla="*/ 0 h 1754523"/>
-              <a:gd name="csX2" fmla="*/ 1396331 w 4188994"/>
-              <a:gd name="csY2" fmla="*/ 0 h 1754523"/>
-              <a:gd name="csX3" fmla="*/ 1968827 w 4188994"/>
-              <a:gd name="csY3" fmla="*/ 0 h 1754523"/>
-              <a:gd name="csX4" fmla="*/ 2666993 w 4188994"/>
-              <a:gd name="csY4" fmla="*/ 0 h 1754523"/>
-              <a:gd name="csX5" fmla="*/ 3407048 w 4188994"/>
-              <a:gd name="csY5" fmla="*/ 0 h 1754523"/>
-              <a:gd name="csX6" fmla="*/ 4188994 w 4188994"/>
-              <a:gd name="csY6" fmla="*/ 0 h 1754523"/>
-              <a:gd name="csX7" fmla="*/ 4188994 w 4188994"/>
-              <a:gd name="csY7" fmla="*/ 584841 h 1754523"/>
-              <a:gd name="csX8" fmla="*/ 4188994 w 4188994"/>
-              <a:gd name="csY8" fmla="*/ 1187227 h 1754523"/>
-              <a:gd name="csX9" fmla="*/ 4188994 w 4188994"/>
-              <a:gd name="csY9" fmla="*/ 1754523 h 1754523"/>
-              <a:gd name="csX10" fmla="*/ 3532718 w 4188994"/>
-              <a:gd name="csY10" fmla="*/ 1754523 h 1754523"/>
-              <a:gd name="csX11" fmla="*/ 2876443 w 4188994"/>
-              <a:gd name="csY11" fmla="*/ 1754523 h 1754523"/>
-              <a:gd name="csX12" fmla="*/ 2220167 w 4188994"/>
-              <a:gd name="csY12" fmla="*/ 1754523 h 1754523"/>
-              <a:gd name="csX13" fmla="*/ 1605781 w 4188994"/>
-              <a:gd name="csY13" fmla="*/ 1754523 h 1754523"/>
-              <a:gd name="csX14" fmla="*/ 865725 w 4188994"/>
-              <a:gd name="csY14" fmla="*/ 1754523 h 1754523"/>
-              <a:gd name="csX15" fmla="*/ 0 w 4188994"/>
-              <a:gd name="csY15" fmla="*/ 1754523 h 1754523"/>
-              <a:gd name="csX16" fmla="*/ 0 w 4188994"/>
-              <a:gd name="csY16" fmla="*/ 1187227 h 1754523"/>
-              <a:gd name="csX17" fmla="*/ 0 w 4188994"/>
-              <a:gd name="csY17" fmla="*/ 602386 h 1754523"/>
-              <a:gd name="csX18" fmla="*/ 0 w 4188994"/>
-              <a:gd name="csY18" fmla="*/ 0 h 1754523"/>
-            </a:gdLst>
-            <a:ahLst/>
-            <a:cxnLst>
-              <a:cxn ang="0">
-                <a:pos x="csX0" y="csY0"/>
-              </a:cxn>
-              <a:cxn ang="0">
-                <a:pos x="csX1" y="csY1"/>
-              </a:cxn>
-              <a:cxn ang="0">
-                <a:pos x="csX2" y="csY2"/>
-              </a:cxn>
-              <a:cxn ang="0">
-                <a:pos x="csX3" y="csY3"/>
-              </a:cxn>
-              <a:cxn ang="0">
-                <a:pos x="csX4" y="csY4"/>
-              </a:cxn>
-              <a:cxn ang="0">
-                <a:pos x="csX5" y="csY5"/>
-              </a:cxn>
-              <a:cxn ang="0">
-                <a:pos x="csX6" y="csY6"/>
-              </a:cxn>
-              <a:cxn ang="0">
-                <a:pos x="csX7" y="csY7"/>
-              </a:cxn>
-              <a:cxn ang="0">
-                <a:pos x="csX8" y="csY8"/>
-              </a:cxn>
-              <a:cxn ang="0">
-                <a:pos x="csX9" y="csY9"/>
-              </a:cxn>
-              <a:cxn ang="0">
-                <a:pos x="csX10" y="csY10"/>
-              </a:cxn>
-              <a:cxn ang="0">
-                <a:pos x="csX11" y="csY11"/>
-              </a:cxn>
-              <a:cxn ang="0">
-                <a:pos x="csX12" y="csY12"/>
-              </a:cxn>
-              <a:cxn ang="0">
-                <a:pos x="csX13" y="csY13"/>
-              </a:cxn>
-              <a:cxn ang="0">
-                <a:pos x="csX14" y="csY14"/>
-              </a:cxn>
-              <a:cxn ang="0">
-                <a:pos x="csX15" y="csY15"/>
-              </a:cxn>
-              <a:cxn ang="0">
-                <a:pos x="csX16" y="csY16"/>
-              </a:cxn>
-              <a:cxn ang="0">
-                <a:pos x="csX17" y="csY17"/>
-              </a:cxn>
-              <a:cxn ang="0">
-                <a:pos x="csX18" y="csY18"/>
-              </a:cxn>
-            </a:cxnLst>
-            <a:rect l="l" t="t" r="r" b="b"/>
-            <a:pathLst>
-              <a:path w="4188994" h="1754523" fill="none" extrusionOk="0">
-                <a:moveTo>
-                  <a:pt x="0" y="0"/>
-                </a:moveTo>
-                <a:cubicBezTo>
-                  <a:pt x="236636" y="37054"/>
-                  <a:pt x="592827" y="-11655"/>
-                  <a:pt x="781946" y="0"/>
-                </a:cubicBezTo>
-                <a:cubicBezTo>
-                  <a:pt x="971065" y="11655"/>
-                  <a:pt x="1268301" y="17108"/>
-                  <a:pt x="1396331" y="0"/>
-                </a:cubicBezTo>
-                <a:cubicBezTo>
-                  <a:pt x="1524361" y="-17108"/>
-                  <a:pt x="1731059" y="5859"/>
-                  <a:pt x="1968827" y="0"/>
-                </a:cubicBezTo>
-                <a:cubicBezTo>
-                  <a:pt x="2206595" y="-5859"/>
-                  <a:pt x="2322111" y="21705"/>
-                  <a:pt x="2666993" y="0"/>
-                </a:cubicBezTo>
-                <a:cubicBezTo>
-                  <a:pt x="3011875" y="-21705"/>
-                  <a:pt x="3133172" y="-18224"/>
-                  <a:pt x="3407048" y="0"/>
-                </a:cubicBezTo>
-                <a:cubicBezTo>
-                  <a:pt x="3680924" y="18224"/>
-                  <a:pt x="3914811" y="23133"/>
-                  <a:pt x="4188994" y="0"/>
-                </a:cubicBezTo>
-                <a:cubicBezTo>
-                  <a:pt x="4208130" y="168444"/>
-                  <a:pt x="4170347" y="316033"/>
-                  <a:pt x="4188994" y="584841"/>
-                </a:cubicBezTo>
-                <a:cubicBezTo>
-                  <a:pt x="4207641" y="853649"/>
-                  <a:pt x="4160663" y="1007673"/>
-                  <a:pt x="4188994" y="1187227"/>
-                </a:cubicBezTo>
-                <a:cubicBezTo>
-                  <a:pt x="4217325" y="1366781"/>
-                  <a:pt x="4181118" y="1592107"/>
-                  <a:pt x="4188994" y="1754523"/>
-                </a:cubicBezTo>
-                <a:cubicBezTo>
-                  <a:pt x="3939220" y="1752329"/>
-                  <a:pt x="3847119" y="1743512"/>
-                  <a:pt x="3532718" y="1754523"/>
-                </a:cubicBezTo>
-                <a:cubicBezTo>
-                  <a:pt x="3218317" y="1765534"/>
-                  <a:pt x="3102333" y="1783081"/>
-                  <a:pt x="2876443" y="1754523"/>
-                </a:cubicBezTo>
-                <a:cubicBezTo>
-                  <a:pt x="2650553" y="1725965"/>
-                  <a:pt x="2354874" y="1722033"/>
-                  <a:pt x="2220167" y="1754523"/>
-                </a:cubicBezTo>
-                <a:cubicBezTo>
-                  <a:pt x="2085460" y="1787013"/>
-                  <a:pt x="1879054" y="1755863"/>
-                  <a:pt x="1605781" y="1754523"/>
-                </a:cubicBezTo>
-                <a:cubicBezTo>
-                  <a:pt x="1332508" y="1753183"/>
-                  <a:pt x="1082021" y="1780284"/>
-                  <a:pt x="865725" y="1754523"/>
-                </a:cubicBezTo>
-                <a:cubicBezTo>
-                  <a:pt x="649429" y="1728762"/>
-                  <a:pt x="206558" y="1752409"/>
-                  <a:pt x="0" y="1754523"/>
-                </a:cubicBezTo>
-                <a:cubicBezTo>
-                  <a:pt x="20438" y="1550477"/>
-                  <a:pt x="-707" y="1331189"/>
-                  <a:pt x="0" y="1187227"/>
-                </a:cubicBezTo>
-                <a:cubicBezTo>
-                  <a:pt x="707" y="1043265"/>
-                  <a:pt x="-23152" y="809171"/>
-                  <a:pt x="0" y="602386"/>
-                </a:cubicBezTo>
-                <a:cubicBezTo>
-                  <a:pt x="23152" y="395601"/>
-                  <a:pt x="-19376" y="209665"/>
-                  <a:pt x="0" y="0"/>
-                </a:cubicBezTo>
-                <a:close/>
-              </a:path>
-              <a:path w="4188994" h="1754523" stroke="0" extrusionOk="0">
-                <a:moveTo>
-                  <a:pt x="0" y="0"/>
-                </a:moveTo>
-                <a:cubicBezTo>
-                  <a:pt x="134152" y="-3936"/>
-                  <a:pt x="363713" y="28142"/>
-                  <a:pt x="572496" y="0"/>
-                </a:cubicBezTo>
-                <a:cubicBezTo>
-                  <a:pt x="781279" y="-28142"/>
-                  <a:pt x="1060538" y="-27920"/>
-                  <a:pt x="1186882" y="0"/>
-                </a:cubicBezTo>
-                <a:cubicBezTo>
-                  <a:pt x="1313226" y="27920"/>
-                  <a:pt x="1743030" y="34114"/>
-                  <a:pt x="1885047" y="0"/>
-                </a:cubicBezTo>
-                <a:cubicBezTo>
-                  <a:pt x="2027065" y="-34114"/>
-                  <a:pt x="2339005" y="-29961"/>
-                  <a:pt x="2583213" y="0"/>
-                </a:cubicBezTo>
-                <a:cubicBezTo>
-                  <a:pt x="2827421" y="29961"/>
-                  <a:pt x="2943580" y="-23878"/>
-                  <a:pt x="3281379" y="0"/>
-                </a:cubicBezTo>
-                <a:cubicBezTo>
-                  <a:pt x="3619178" y="23878"/>
-                  <a:pt x="3775786" y="-40490"/>
-                  <a:pt x="4188994" y="0"/>
-                </a:cubicBezTo>
-                <a:cubicBezTo>
-                  <a:pt x="4188736" y="145724"/>
-                  <a:pt x="4183372" y="382290"/>
-                  <a:pt x="4188994" y="532205"/>
-                </a:cubicBezTo>
-                <a:cubicBezTo>
-                  <a:pt x="4194616" y="682121"/>
-                  <a:pt x="4203493" y="875154"/>
-                  <a:pt x="4188994" y="1064411"/>
-                </a:cubicBezTo>
-                <a:cubicBezTo>
-                  <a:pt x="4174495" y="1253668"/>
-                  <a:pt x="4190945" y="1536203"/>
-                  <a:pt x="4188994" y="1754523"/>
-                </a:cubicBezTo>
-                <a:cubicBezTo>
-                  <a:pt x="3902050" y="1729772"/>
-                  <a:pt x="3842658" y="1723338"/>
-                  <a:pt x="3532718" y="1754523"/>
-                </a:cubicBezTo>
-                <a:cubicBezTo>
-                  <a:pt x="3222778" y="1785708"/>
-                  <a:pt x="3181874" y="1733292"/>
-                  <a:pt x="2918332" y="1754523"/>
-                </a:cubicBezTo>
-                <a:cubicBezTo>
-                  <a:pt x="2654790" y="1775754"/>
-                  <a:pt x="2537475" y="1736955"/>
-                  <a:pt x="2345837" y="1754523"/>
-                </a:cubicBezTo>
-                <a:cubicBezTo>
-                  <a:pt x="2154199" y="1772091"/>
-                  <a:pt x="1898454" y="1728812"/>
-                  <a:pt x="1773341" y="1754523"/>
-                </a:cubicBezTo>
-                <a:cubicBezTo>
-                  <a:pt x="1648228" y="1780234"/>
-                  <a:pt x="1154585" y="1752910"/>
-                  <a:pt x="991395" y="1754523"/>
-                </a:cubicBezTo>
-                <a:cubicBezTo>
-                  <a:pt x="828205" y="1756136"/>
-                  <a:pt x="346179" y="1797029"/>
-                  <a:pt x="0" y="1754523"/>
-                </a:cubicBezTo>
-                <a:cubicBezTo>
-                  <a:pt x="1397" y="1582199"/>
-                  <a:pt x="21123" y="1341629"/>
-                  <a:pt x="0" y="1169682"/>
-                </a:cubicBezTo>
-                <a:cubicBezTo>
-                  <a:pt x="-21123" y="997735"/>
-                  <a:pt x="16619" y="832491"/>
-                  <a:pt x="0" y="584841"/>
-                </a:cubicBezTo>
-                <a:cubicBezTo>
-                  <a:pt x="-16619" y="337191"/>
-                  <a:pt x="1524" y="196426"/>
-                  <a:pt x="0" y="0"/>
-                </a:cubicBezTo>
-                <a:close/>
-              </a:path>
-            </a:pathLst>
-          </a:custGeom>
-          <a:solidFill>
-            <a:srgbClr val="000000">
-              <a:alpha val="53000"/>
-            </a:srgbClr>
-          </a:solidFill>
-          <a:ln w="28575">
-            <a:solidFill>
-              <a:srgbClr val="FF0000"/>
-            </a:solidFill>
-            <a:extLst>
-              <a:ext uri="{C807C97D-BFC1-408E-A445-0C87EB9F89A2}">
-                <ask:lineSketchStyleProps xmlns:ask="http://schemas.microsoft.com/office/drawing/2018/sketchyshapes" sd="1577159181">
-                  <ask:type>
-                    <ask:lineSketchFreehand/>
-                  </ask:type>
-                </ask:lineSketchStyleProps>
-              </a:ext>
-            </a:extLst>
-          </a:ln>
-        </p:spPr>
-        <p:txBody>
-          <a:bodyPr vert="horz" lIns="91440" tIns="45720" rIns="91440" bIns="45720" rtlCol="0" anchor="t">
-            <a:normAutofit/>
-          </a:bodyPr>
-          <a:lstStyle/>
-          <a:p>
-            <a:pPr marL="0" indent="0" algn="ctr">
-              <a:lnSpc>
-                <a:spcPct val="170000"/>
-              </a:lnSpc>
-              <a:buNone/>
-            </a:pPr>
-            <a:r>
-              <a:rPr lang="hu-HU" dirty="0">
-                <a:solidFill>
-                  <a:schemeClr val="bg1"/>
-                </a:solidFill>
-              </a:rPr>
-              <a:t>Hagymási Gyula Levente</a:t>
-            </a:r>
-          </a:p>
-          <a:p>
-            <a:pPr marL="0" indent="0" algn="ctr">
-              <a:lnSpc>
-                <a:spcPct val="170000"/>
-              </a:lnSpc>
-              <a:buNone/>
-            </a:pPr>
-            <a:r>
-              <a:rPr lang="hu-HU" dirty="0">
-                <a:solidFill>
-                  <a:schemeClr val="bg1"/>
-                </a:solidFill>
-              </a:rPr>
-              <a:t>Felkészítő tanárunk</a:t>
-            </a:r>
-          </a:p>
-          <a:p>
-            <a:pPr marL="0" indent="0" algn="ctr">
-              <a:lnSpc>
-                <a:spcPct val="170000"/>
-              </a:lnSpc>
-              <a:buNone/>
-            </a:pPr>
-            <a:endParaRPr lang="hu-HU" dirty="0">
-              <a:solidFill>
-                <a:schemeClr val="bg1"/>
-              </a:solidFill>
-            </a:endParaRPr>
-          </a:p>
-        </p:txBody>
-      </p:sp>
-      <p:sp>
-        <p:nvSpPr>
-          <p:cNvPr id="5" name="Tartalom helye 2">
-            <a:extLst>
-              <a:ext uri="{FF2B5EF4-FFF2-40B4-BE49-F238E27FC236}">
-                <a16:creationId xmlns:a16="http://schemas.microsoft.com/office/drawing/2014/main" id="{77F2F672-5E98-D99C-EF71-A3DA394DEE0C}"/>
-              </a:ext>
-            </a:extLst>
-          </p:cNvPr>
-          <p:cNvSpPr txBox="1">
-            <a:spLocks/>
-          </p:cNvSpPr>
-          <p:nvPr/>
-        </p:nvSpPr>
-        <p:spPr>
-          <a:xfrm>
-            <a:off x="7297153" y="2018131"/>
-            <a:ext cx="4509836" cy="1754523"/>
-          </a:xfrm>
-          <a:custGeom>
-            <a:avLst/>
-            <a:gdLst>
-              <a:gd name="csX0" fmla="*/ 0 w 4509836"/>
-              <a:gd name="csY0" fmla="*/ 0 h 1754523"/>
-              <a:gd name="csX1" fmla="*/ 554066 w 4509836"/>
-              <a:gd name="csY1" fmla="*/ 0 h 1754523"/>
-              <a:gd name="csX2" fmla="*/ 1198328 w 4509836"/>
-              <a:gd name="csY2" fmla="*/ 0 h 1754523"/>
-              <a:gd name="csX3" fmla="*/ 1842590 w 4509836"/>
-              <a:gd name="csY3" fmla="*/ 0 h 1754523"/>
-              <a:gd name="csX4" fmla="*/ 2351557 w 4509836"/>
-              <a:gd name="csY4" fmla="*/ 0 h 1754523"/>
-              <a:gd name="csX5" fmla="*/ 2995820 w 4509836"/>
-              <a:gd name="csY5" fmla="*/ 0 h 1754523"/>
-              <a:gd name="csX6" fmla="*/ 3549885 w 4509836"/>
-              <a:gd name="csY6" fmla="*/ 0 h 1754523"/>
-              <a:gd name="csX7" fmla="*/ 4509836 w 4509836"/>
-              <a:gd name="csY7" fmla="*/ 0 h 1754523"/>
-              <a:gd name="csX8" fmla="*/ 4509836 w 4509836"/>
-              <a:gd name="csY8" fmla="*/ 602386 h 1754523"/>
-              <a:gd name="csX9" fmla="*/ 4509836 w 4509836"/>
-              <a:gd name="csY9" fmla="*/ 1134592 h 1754523"/>
-              <a:gd name="csX10" fmla="*/ 4509836 w 4509836"/>
-              <a:gd name="csY10" fmla="*/ 1754523 h 1754523"/>
-              <a:gd name="csX11" fmla="*/ 4000869 w 4509836"/>
-              <a:gd name="csY11" fmla="*/ 1754523 h 1754523"/>
-              <a:gd name="csX12" fmla="*/ 3401705 w 4509836"/>
-              <a:gd name="csY12" fmla="*/ 1754523 h 1754523"/>
-              <a:gd name="csX13" fmla="*/ 2847639 w 4509836"/>
-              <a:gd name="csY13" fmla="*/ 1754523 h 1754523"/>
-              <a:gd name="csX14" fmla="*/ 2113180 w 4509836"/>
-              <a:gd name="csY14" fmla="*/ 1754523 h 1754523"/>
-              <a:gd name="csX15" fmla="*/ 1559115 w 4509836"/>
-              <a:gd name="csY15" fmla="*/ 1754523 h 1754523"/>
-              <a:gd name="csX16" fmla="*/ 914852 w 4509836"/>
-              <a:gd name="csY16" fmla="*/ 1754523 h 1754523"/>
-              <a:gd name="csX17" fmla="*/ 0 w 4509836"/>
-              <a:gd name="csY17" fmla="*/ 1754523 h 1754523"/>
-              <a:gd name="csX18" fmla="*/ 0 w 4509836"/>
-              <a:gd name="csY18" fmla="*/ 1152137 h 1754523"/>
-              <a:gd name="csX19" fmla="*/ 0 w 4509836"/>
-              <a:gd name="csY19" fmla="*/ 584841 h 1754523"/>
-              <a:gd name="csX20" fmla="*/ 0 w 4509836"/>
-              <a:gd name="csY20" fmla="*/ 0 h 1754523"/>
-            </a:gdLst>
-            <a:ahLst/>
-            <a:cxnLst>
-              <a:cxn ang="0">
-                <a:pos x="csX0" y="csY0"/>
-              </a:cxn>
-              <a:cxn ang="0">
-                <a:pos x="csX1" y="csY1"/>
-              </a:cxn>
-              <a:cxn ang="0">
-                <a:pos x="csX2" y="csY2"/>
-              </a:cxn>
-              <a:cxn ang="0">
-                <a:pos x="csX3" y="csY3"/>
-              </a:cxn>
-              <a:cxn ang="0">
-                <a:pos x="csX4" y="csY4"/>
-              </a:cxn>
-              <a:cxn ang="0">
-                <a:pos x="csX5" y="csY5"/>
-              </a:cxn>
-              <a:cxn ang="0">
-                <a:pos x="csX6" y="csY6"/>
-              </a:cxn>
-              <a:cxn ang="0">
-                <a:pos x="csX7" y="csY7"/>
-              </a:cxn>
-              <a:cxn ang="0">
-                <a:pos x="csX8" y="csY8"/>
-              </a:cxn>
-              <a:cxn ang="0">
-                <a:pos x="csX9" y="csY9"/>
-              </a:cxn>
-              <a:cxn ang="0">
-                <a:pos x="csX10" y="csY10"/>
-              </a:cxn>
-              <a:cxn ang="0">
-                <a:pos x="csX11" y="csY11"/>
-              </a:cxn>
-              <a:cxn ang="0">
-                <a:pos x="csX12" y="csY12"/>
-              </a:cxn>
-              <a:cxn ang="0">
-                <a:pos x="csX13" y="csY13"/>
-              </a:cxn>
-              <a:cxn ang="0">
-                <a:pos x="csX14" y="csY14"/>
-              </a:cxn>
-              <a:cxn ang="0">
-                <a:pos x="csX15" y="csY15"/>
-              </a:cxn>
-              <a:cxn ang="0">
-                <a:pos x="csX16" y="csY16"/>
-              </a:cxn>
-              <a:cxn ang="0">
-                <a:pos x="csX17" y="csY17"/>
-              </a:cxn>
-              <a:cxn ang="0">
-                <a:pos x="csX18" y="csY18"/>
-              </a:cxn>
-              <a:cxn ang="0">
-                <a:pos x="csX19" y="csY19"/>
-              </a:cxn>
-              <a:cxn ang="0">
-                <a:pos x="csX20" y="csY20"/>
-              </a:cxn>
-            </a:cxnLst>
-            <a:rect l="l" t="t" r="r" b="b"/>
-            <a:pathLst>
-              <a:path w="4509836" h="1754523" fill="none" extrusionOk="0">
-                <a:moveTo>
-                  <a:pt x="0" y="0"/>
-                </a:moveTo>
-                <a:cubicBezTo>
-                  <a:pt x="134890" y="10069"/>
-                  <a:pt x="407700" y="18537"/>
-                  <a:pt x="554066" y="0"/>
-                </a:cubicBezTo>
-                <a:cubicBezTo>
-                  <a:pt x="700432" y="-18537"/>
-                  <a:pt x="997912" y="23480"/>
-                  <a:pt x="1198328" y="0"/>
-                </a:cubicBezTo>
-                <a:cubicBezTo>
-                  <a:pt x="1398744" y="-23480"/>
-                  <a:pt x="1706176" y="21543"/>
-                  <a:pt x="1842590" y="0"/>
-                </a:cubicBezTo>
-                <a:cubicBezTo>
-                  <a:pt x="1979004" y="-21543"/>
-                  <a:pt x="2098448" y="16388"/>
-                  <a:pt x="2351557" y="0"/>
-                </a:cubicBezTo>
-                <a:cubicBezTo>
-                  <a:pt x="2604666" y="-16388"/>
-                  <a:pt x="2689543" y="8144"/>
-                  <a:pt x="2995820" y="0"/>
-                </a:cubicBezTo>
-                <a:cubicBezTo>
-                  <a:pt x="3302097" y="-8144"/>
-                  <a:pt x="3425356" y="-4786"/>
-                  <a:pt x="3549885" y="0"/>
-                </a:cubicBezTo>
-                <a:cubicBezTo>
-                  <a:pt x="3674415" y="4786"/>
-                  <a:pt x="4091702" y="22630"/>
-                  <a:pt x="4509836" y="0"/>
-                </a:cubicBezTo>
-                <a:cubicBezTo>
-                  <a:pt x="4482607" y="201762"/>
-                  <a:pt x="4494317" y="334686"/>
-                  <a:pt x="4509836" y="602386"/>
-                </a:cubicBezTo>
-                <a:cubicBezTo>
-                  <a:pt x="4525355" y="870086"/>
-                  <a:pt x="4485280" y="886164"/>
-                  <a:pt x="4509836" y="1134592"/>
-                </a:cubicBezTo>
-                <a:cubicBezTo>
-                  <a:pt x="4534392" y="1383020"/>
-                  <a:pt x="4502118" y="1555749"/>
-                  <a:pt x="4509836" y="1754523"/>
-                </a:cubicBezTo>
-                <a:cubicBezTo>
-                  <a:pt x="4407694" y="1741707"/>
-                  <a:pt x="4127259" y="1749150"/>
-                  <a:pt x="4000869" y="1754523"/>
-                </a:cubicBezTo>
-                <a:cubicBezTo>
-                  <a:pt x="3874479" y="1759896"/>
-                  <a:pt x="3559448" y="1764174"/>
-                  <a:pt x="3401705" y="1754523"/>
-                </a:cubicBezTo>
-                <a:cubicBezTo>
-                  <a:pt x="3243962" y="1744872"/>
-                  <a:pt x="3016053" y="1780339"/>
-                  <a:pt x="2847639" y="1754523"/>
-                </a:cubicBezTo>
-                <a:cubicBezTo>
-                  <a:pt x="2679225" y="1728707"/>
-                  <a:pt x="2271018" y="1751326"/>
-                  <a:pt x="2113180" y="1754523"/>
-                </a:cubicBezTo>
-                <a:cubicBezTo>
-                  <a:pt x="1955342" y="1757720"/>
-                  <a:pt x="1783801" y="1772377"/>
-                  <a:pt x="1559115" y="1754523"/>
-                </a:cubicBezTo>
-                <a:cubicBezTo>
-                  <a:pt x="1334429" y="1736669"/>
-                  <a:pt x="1109560" y="1773827"/>
-                  <a:pt x="914852" y="1754523"/>
-                </a:cubicBezTo>
-                <a:cubicBezTo>
-                  <a:pt x="720144" y="1735219"/>
-                  <a:pt x="433218" y="1747246"/>
-                  <a:pt x="0" y="1754523"/>
-                </a:cubicBezTo>
-                <a:cubicBezTo>
-                  <a:pt x="16529" y="1542294"/>
-                  <a:pt x="18755" y="1422823"/>
-                  <a:pt x="0" y="1152137"/>
-                </a:cubicBezTo>
-                <a:cubicBezTo>
-                  <a:pt x="-18755" y="881451"/>
-                  <a:pt x="8311" y="723666"/>
-                  <a:pt x="0" y="584841"/>
-                </a:cubicBezTo>
-                <a:cubicBezTo>
-                  <a:pt x="-8311" y="446016"/>
-                  <a:pt x="-13177" y="200150"/>
-                  <a:pt x="0" y="0"/>
-                </a:cubicBezTo>
-                <a:close/>
-              </a:path>
-              <a:path w="4509836" h="1754523" stroke="0" extrusionOk="0">
-                <a:moveTo>
-                  <a:pt x="0" y="0"/>
-                </a:moveTo>
-                <a:cubicBezTo>
-                  <a:pt x="131358" y="20805"/>
-                  <a:pt x="335559" y="-19965"/>
-                  <a:pt x="599164" y="0"/>
-                </a:cubicBezTo>
-                <a:cubicBezTo>
-                  <a:pt x="862769" y="19965"/>
-                  <a:pt x="887582" y="-15146"/>
-                  <a:pt x="1153229" y="0"/>
-                </a:cubicBezTo>
-                <a:cubicBezTo>
-                  <a:pt x="1418876" y="15146"/>
-                  <a:pt x="1565175" y="-25280"/>
-                  <a:pt x="1707295" y="0"/>
-                </a:cubicBezTo>
-                <a:cubicBezTo>
-                  <a:pt x="1849415" y="25280"/>
-                  <a:pt x="2047227" y="17835"/>
-                  <a:pt x="2216262" y="0"/>
-                </a:cubicBezTo>
-                <a:cubicBezTo>
-                  <a:pt x="2385297" y="-17835"/>
-                  <a:pt x="2486580" y="24027"/>
-                  <a:pt x="2725229" y="0"/>
-                </a:cubicBezTo>
-                <a:cubicBezTo>
-                  <a:pt x="2963878" y="-24027"/>
-                  <a:pt x="3003830" y="8218"/>
-                  <a:pt x="3234197" y="0"/>
-                </a:cubicBezTo>
-                <a:cubicBezTo>
-                  <a:pt x="3464564" y="-8218"/>
-                  <a:pt x="3593959" y="27816"/>
-                  <a:pt x="3923557" y="0"/>
-                </a:cubicBezTo>
-                <a:cubicBezTo>
-                  <a:pt x="4253155" y="-27816"/>
-                  <a:pt x="4243479" y="27785"/>
-                  <a:pt x="4509836" y="0"/>
-                </a:cubicBezTo>
-                <a:cubicBezTo>
-                  <a:pt x="4489779" y="173889"/>
-                  <a:pt x="4523550" y="307748"/>
-                  <a:pt x="4509836" y="549751"/>
-                </a:cubicBezTo>
-                <a:cubicBezTo>
-                  <a:pt x="4496122" y="791754"/>
-                  <a:pt x="4530507" y="892973"/>
-                  <a:pt x="4509836" y="1099501"/>
-                </a:cubicBezTo>
-                <a:cubicBezTo>
-                  <a:pt x="4489166" y="1306029"/>
-                  <a:pt x="4498825" y="1525348"/>
-                  <a:pt x="4509836" y="1754523"/>
-                </a:cubicBezTo>
-                <a:cubicBezTo>
-                  <a:pt x="4342439" y="1728998"/>
-                  <a:pt x="4070752" y="1744629"/>
-                  <a:pt x="3955770" y="1754523"/>
-                </a:cubicBezTo>
-                <a:cubicBezTo>
-                  <a:pt x="3840788" y="1764417"/>
-                  <a:pt x="3633663" y="1775292"/>
-                  <a:pt x="3401705" y="1754523"/>
-                </a:cubicBezTo>
-                <a:cubicBezTo>
-                  <a:pt x="3169748" y="1733754"/>
-                  <a:pt x="2908275" y="1747588"/>
-                  <a:pt x="2712344" y="1754523"/>
-                </a:cubicBezTo>
-                <a:cubicBezTo>
-                  <a:pt x="2516413" y="1761458"/>
-                  <a:pt x="2303569" y="1787884"/>
-                  <a:pt x="2022984" y="1754523"/>
-                </a:cubicBezTo>
-                <a:cubicBezTo>
-                  <a:pt x="1742399" y="1721162"/>
-                  <a:pt x="1659557" y="1724597"/>
-                  <a:pt x="1423820" y="1754523"/>
-                </a:cubicBezTo>
-                <a:cubicBezTo>
-                  <a:pt x="1188083" y="1784449"/>
-                  <a:pt x="875200" y="1753663"/>
-                  <a:pt x="689361" y="1754523"/>
-                </a:cubicBezTo>
-                <a:cubicBezTo>
-                  <a:pt x="503522" y="1755383"/>
-                  <a:pt x="232060" y="1779946"/>
-                  <a:pt x="0" y="1754523"/>
-                </a:cubicBezTo>
-                <a:cubicBezTo>
-                  <a:pt x="-27594" y="1566231"/>
-                  <a:pt x="9055" y="1404555"/>
-                  <a:pt x="0" y="1187227"/>
-                </a:cubicBezTo>
-                <a:cubicBezTo>
-                  <a:pt x="-9055" y="969899"/>
-                  <a:pt x="-13868" y="815265"/>
-                  <a:pt x="0" y="655022"/>
-                </a:cubicBezTo>
-                <a:cubicBezTo>
-                  <a:pt x="13868" y="494780"/>
-                  <a:pt x="-30547" y="314009"/>
-                  <a:pt x="0" y="0"/>
-                </a:cubicBezTo>
-                <a:close/>
-              </a:path>
-            </a:pathLst>
-          </a:custGeom>
-          <a:solidFill>
-            <a:srgbClr val="000000">
-              <a:alpha val="53000"/>
-            </a:srgbClr>
-          </a:solidFill>
-          <a:ln w="28575">
-            <a:solidFill>
-              <a:srgbClr val="FF0000"/>
-            </a:solidFill>
-            <a:extLst>
-              <a:ext uri="{C807C97D-BFC1-408E-A445-0C87EB9F89A2}">
-                <ask:lineSketchStyleProps xmlns:ask="http://schemas.microsoft.com/office/drawing/2018/sketchyshapes" sd="3499211612">
-                  <a:prstGeom prst="rect">
-                    <a:avLst/>
-                  </a:prstGeom>
-                  <ask:type>
-                    <ask:lineSketchFreehand/>
-                  </ask:type>
-                </ask:lineSketchStyleProps>
-              </a:ext>
-            </a:extLst>
-          </a:ln>
-        </p:spPr>
-        <p:txBody>
-          <a:bodyPr vert="horz" lIns="91440" tIns="45720" rIns="91440" bIns="45720" rtlCol="0" anchor="t">
-            <a:normAutofit fontScale="77500" lnSpcReduction="20000"/>
-          </a:bodyPr>
-          <a:lstStyle>
-            <a:lvl1pPr marL="228600" indent="-228600" algn="l" defTabSz="914400" rtl="0" eaLnBrk="1" latinLnBrk="0" hangingPunct="1">
-              <a:lnSpc>
-                <a:spcPct val="90000"/>
-              </a:lnSpc>
-              <a:spcBef>
-                <a:spcPts val="1000"/>
-              </a:spcBef>
-              <a:buFont typeface="Arial" panose="020B0604020202020204" pitchFamily="34" charset="0"/>
-              <a:buChar char="•"/>
-              <a:defRPr sz="2800" kern="1200">
-                <a:solidFill>
-                  <a:schemeClr val="tx1"/>
-                </a:solidFill>
-                <a:latin typeface="+mn-lt"/>
-                <a:ea typeface="+mn-ea"/>
-                <a:cs typeface="+mn-cs"/>
-              </a:defRPr>
-            </a:lvl1pPr>
-            <a:lvl2pPr marL="685800" indent="-228600" algn="l" defTabSz="914400" rtl="0" eaLnBrk="1" latinLnBrk="0" hangingPunct="1">
-              <a:lnSpc>
-                <a:spcPct val="90000"/>
-              </a:lnSpc>
-              <a:spcBef>
-                <a:spcPts val="500"/>
-              </a:spcBef>
-              <a:buFont typeface="Arial" panose="020B0604020202020204" pitchFamily="34" charset="0"/>
-              <a:buChar char="•"/>
-              <a:defRPr sz="2400" kern="1200">
-                <a:solidFill>
-                  <a:schemeClr val="tx1"/>
-                </a:solidFill>
-                <a:latin typeface="+mn-lt"/>
-                <a:ea typeface="+mn-ea"/>
-                <a:cs typeface="+mn-cs"/>
-              </a:defRPr>
-            </a:lvl2pPr>
-            <a:lvl3pPr marL="1143000" indent="-228600" algn="l" defTabSz="914400" rtl="0" eaLnBrk="1" latinLnBrk="0" hangingPunct="1">
-              <a:lnSpc>
-                <a:spcPct val="90000"/>
-              </a:lnSpc>
-              <a:spcBef>
-                <a:spcPts val="500"/>
-              </a:spcBef>
-              <a:buFont typeface="Arial" panose="020B0604020202020204" pitchFamily="34" charset="0"/>
-              <a:buChar char="•"/>
-              <a:defRPr sz="2000" kern="1200">
-                <a:solidFill>
-                  <a:schemeClr val="tx1"/>
-                </a:solidFill>
-                <a:latin typeface="+mn-lt"/>
-                <a:ea typeface="+mn-ea"/>
-                <a:cs typeface="+mn-cs"/>
-              </a:defRPr>
-            </a:lvl3pPr>
-            <a:lvl4pPr marL="1600200" indent="-228600" algn="l" defTabSz="914400" rtl="0" eaLnBrk="1" latinLnBrk="0" hangingPunct="1">
-              <a:lnSpc>
-                <a:spcPct val="90000"/>
-              </a:lnSpc>
-              <a:spcBef>
-                <a:spcPts val="500"/>
-              </a:spcBef>
-              <a:buFont typeface="Arial" panose="020B0604020202020204" pitchFamily="34" charset="0"/>
-              <a:buChar char="•"/>
-              <a:defRPr sz="1800" kern="1200">
-                <a:solidFill>
-                  <a:schemeClr val="tx1"/>
-                </a:solidFill>
-                <a:latin typeface="+mn-lt"/>
-                <a:ea typeface="+mn-ea"/>
-                <a:cs typeface="+mn-cs"/>
-              </a:defRPr>
-            </a:lvl4pPr>
-            <a:lvl5pPr marL="2057400" indent="-228600" algn="l" defTabSz="914400" rtl="0" eaLnBrk="1" latinLnBrk="0" hangingPunct="1">
-              <a:lnSpc>
-                <a:spcPct val="90000"/>
-              </a:lnSpc>
-              <a:spcBef>
-                <a:spcPts val="500"/>
-              </a:spcBef>
-              <a:buFont typeface="Arial" panose="020B0604020202020204" pitchFamily="34" charset="0"/>
-              <a:buChar char="•"/>
-              <a:defRPr sz="1800" kern="1200">
-                <a:solidFill>
-                  <a:schemeClr val="tx1"/>
-                </a:solidFill>
-                <a:latin typeface="+mn-lt"/>
-                <a:ea typeface="+mn-ea"/>
-                <a:cs typeface="+mn-cs"/>
-              </a:defRPr>
-            </a:lvl5pPr>
-            <a:lvl6pPr marL="2514600" indent="-228600" algn="l" defTabSz="914400" rtl="0" eaLnBrk="1" latinLnBrk="0" hangingPunct="1">
-              <a:lnSpc>
-                <a:spcPct val="90000"/>
-              </a:lnSpc>
-              <a:spcBef>
-                <a:spcPts val="500"/>
-              </a:spcBef>
-              <a:buFont typeface="Arial" panose="020B0604020202020204" pitchFamily="34" charset="0"/>
-              <a:buChar char="•"/>
-              <a:defRPr sz="1800" kern="1200">
-                <a:solidFill>
-                  <a:schemeClr val="tx1"/>
-                </a:solidFill>
-                <a:latin typeface="+mn-lt"/>
-                <a:ea typeface="+mn-ea"/>
-                <a:cs typeface="+mn-cs"/>
-              </a:defRPr>
-            </a:lvl6pPr>
-            <a:lvl7pPr marL="2971800" indent="-228600" algn="l" defTabSz="914400" rtl="0" eaLnBrk="1" latinLnBrk="0" hangingPunct="1">
-              <a:lnSpc>
-                <a:spcPct val="90000"/>
-              </a:lnSpc>
-              <a:spcBef>
-                <a:spcPts val="500"/>
-              </a:spcBef>
-              <a:buFont typeface="Arial" panose="020B0604020202020204" pitchFamily="34" charset="0"/>
-              <a:buChar char="•"/>
-              <a:defRPr sz="1800" kern="1200">
-                <a:solidFill>
-                  <a:schemeClr val="tx1"/>
-                </a:solidFill>
-                <a:latin typeface="+mn-lt"/>
-                <a:ea typeface="+mn-ea"/>
-                <a:cs typeface="+mn-cs"/>
-              </a:defRPr>
-            </a:lvl7pPr>
-            <a:lvl8pPr marL="3429000" indent="-228600" algn="l" defTabSz="914400" rtl="0" eaLnBrk="1" latinLnBrk="0" hangingPunct="1">
-              <a:lnSpc>
-                <a:spcPct val="90000"/>
-              </a:lnSpc>
-              <a:spcBef>
-                <a:spcPts val="500"/>
-              </a:spcBef>
-              <a:buFont typeface="Arial" panose="020B0604020202020204" pitchFamily="34" charset="0"/>
-              <a:buChar char="•"/>
-              <a:defRPr sz="1800" kern="1200">
-                <a:solidFill>
-                  <a:schemeClr val="tx1"/>
-                </a:solidFill>
-                <a:latin typeface="+mn-lt"/>
-                <a:ea typeface="+mn-ea"/>
-                <a:cs typeface="+mn-cs"/>
-              </a:defRPr>
-            </a:lvl8pPr>
-            <a:lvl9pPr marL="3886200" indent="-228600" algn="l" defTabSz="914400" rtl="0" eaLnBrk="1" latinLnBrk="0" hangingPunct="1">
-              <a:lnSpc>
-                <a:spcPct val="90000"/>
-              </a:lnSpc>
-              <a:spcBef>
-                <a:spcPts val="500"/>
-              </a:spcBef>
-              <a:buFont typeface="Arial" panose="020B0604020202020204" pitchFamily="34" charset="0"/>
-              <a:buChar char="•"/>
-              <a:defRPr sz="1800" kern="1200">
-                <a:solidFill>
-                  <a:schemeClr val="tx1"/>
-                </a:solidFill>
-                <a:latin typeface="+mn-lt"/>
-                <a:ea typeface="+mn-ea"/>
-                <a:cs typeface="+mn-cs"/>
-              </a:defRPr>
-            </a:lvl9pPr>
-          </a:lstStyle>
-          <a:p>
-            <a:pPr marL="0" indent="0" algn="ctr">
-              <a:lnSpc>
-                <a:spcPct val="170000"/>
-              </a:lnSpc>
-              <a:buNone/>
-            </a:pPr>
-            <a:r>
-              <a:rPr lang="hu-HU" sz="4000" dirty="0">
-                <a:solidFill>
-                  <a:schemeClr val="bg1"/>
-                </a:solidFill>
-              </a:rPr>
-              <a:t>Murányi Sándor</a:t>
-            </a:r>
-            <a:endParaRPr lang="hu-HU" dirty="0">
-              <a:solidFill>
-                <a:schemeClr val="bg1"/>
-              </a:solidFill>
-            </a:endParaRPr>
-          </a:p>
-          <a:p>
-            <a:pPr marL="0" indent="0" algn="ctr">
-              <a:lnSpc>
-                <a:spcPct val="190000"/>
-              </a:lnSpc>
-              <a:buNone/>
-            </a:pPr>
-            <a:r>
-              <a:rPr lang="hu-HU" sz="4000" dirty="0">
-                <a:solidFill>
-                  <a:schemeClr val="bg1"/>
-                </a:solidFill>
-              </a:rPr>
-              <a:t>Mentorunk</a:t>
-            </a:r>
-          </a:p>
-          <a:p>
-            <a:pPr marL="0" indent="0" algn="ctr">
-              <a:lnSpc>
-                <a:spcPct val="170000"/>
-              </a:lnSpc>
-              <a:buNone/>
-            </a:pPr>
-            <a:endParaRPr lang="hu-HU" dirty="0">
-              <a:solidFill>
-                <a:schemeClr val="bg1"/>
-              </a:solidFill>
-            </a:endParaRPr>
-          </a:p>
-        </p:txBody>
-      </p:sp>
-    </p:spTree>
-    <p:extLst>
-      <p:ext uri="{BB962C8B-B14F-4D97-AF65-F5344CB8AC3E}">
-        <p14:creationId xmlns:p14="http://schemas.microsoft.com/office/powerpoint/2010/main" val="200586800"/>
-      </p:ext>
-    </p:extLst>
-  </p:cSld>
-  <p:clrMapOvr>
-    <a:masterClrMapping/>
-  </p:clrMapOvr>
-  <mc:AlternateContent xmlns:mc="http://schemas.openxmlformats.org/markup-compatibility/2006" xmlns:p14="http://schemas.microsoft.com/office/powerpoint/2010/main">
-    <mc:Choice Requires="p14">
-      <p:transition spd="slow" p14:dur="1300">
-        <p14:pan dir="u"/>
-      </p:transition>
-    </mc:Choice>
-    <mc:Fallback xmlns="">
-      <p:transition spd="slow">
-        <p:fade/>
-      </p:transition>
-    </mc:Fallback>
-  </mc:AlternateContent>
-</p:sld>
-</file>
-
-<file path=ppt/slides/slide4.xml><?xml version="1.0" encoding="utf-8"?>
-<p:sld xmlns:a="http://schemas.openxmlformats.org/drawingml/2006/main" xmlns:r="http://schemas.openxmlformats.org/officeDocument/2006/relationships" xmlns:p="http://schemas.openxmlformats.org/presentationml/2006/main">
-  <p:cSld>
-    <p:bg>
-      <p:bgPr>
-        <a:blipFill>
-          <a:blip r:embed="rId2"/>
-          <a:stretch>
             <a:fillRect/>
           </a:stretch>
         </a:blipFill>
@@ -9890,7 +7471,7 @@
 </p:sld>
 </file>
 
-<file path=ppt/slides/slide5.xml><?xml version="1.0" encoding="utf-8"?>
+<file path=ppt/slides/slide4.xml><?xml version="1.0" encoding="utf-8"?>
 <p:sld xmlns:a="http://schemas.openxmlformats.org/drawingml/2006/main" xmlns:r="http://schemas.openxmlformats.org/officeDocument/2006/relationships" xmlns:p="http://schemas.openxmlformats.org/presentationml/2006/main">
   <p:cSld>
     <p:bg>
@@ -11128,7 +8709,7 @@
 </p:sld>
 </file>
 
-<file path=ppt/slides/slide6.xml><?xml version="1.0" encoding="utf-8"?>
+<file path=ppt/slides/slide5.xml><?xml version="1.0" encoding="utf-8"?>
 <p:sld xmlns:a="http://schemas.openxmlformats.org/drawingml/2006/main" xmlns:r="http://schemas.openxmlformats.org/officeDocument/2006/relationships" xmlns:p="http://schemas.openxmlformats.org/presentationml/2006/main">
   <p:cSld>
     <p:bg>
@@ -12358,7 +9939,7 @@
 </p:sld>
 </file>
 
-<file path=ppt/slides/slide7.xml><?xml version="1.0" encoding="utf-8"?>
+<file path=ppt/slides/slide6.xml><?xml version="1.0" encoding="utf-8"?>
 <p:sld xmlns:a="http://schemas.openxmlformats.org/drawingml/2006/main" xmlns:r="http://schemas.openxmlformats.org/officeDocument/2006/relationships" xmlns:p="http://schemas.openxmlformats.org/presentationml/2006/main">
   <p:cSld>
     <p:bg>
@@ -13600,7 +11181,7 @@
 </p:sld>
 </file>
 
-<file path=ppt/slides/slide8.xml><?xml version="1.0" encoding="utf-8"?>
+<file path=ppt/slides/slide7.xml><?xml version="1.0" encoding="utf-8"?>
 <p:sld xmlns:a="http://schemas.openxmlformats.org/drawingml/2006/main" xmlns:r="http://schemas.openxmlformats.org/officeDocument/2006/relationships" xmlns:p="http://schemas.openxmlformats.org/presentationml/2006/main">
   <p:cSld>
     <p:bg>
@@ -14845,7 +12426,7 @@
 </p:sld>
 </file>
 
-<file path=ppt/slides/slide9.xml><?xml version="1.0" encoding="utf-8"?>
+<file path=ppt/slides/slide8.xml><?xml version="1.0" encoding="utf-8"?>
 <p:sld xmlns:a="http://schemas.openxmlformats.org/drawingml/2006/main" xmlns:r="http://schemas.openxmlformats.org/officeDocument/2006/relationships" xmlns:p="http://schemas.openxmlformats.org/presentationml/2006/main">
   <p:cSld>
     <p:bg>
@@ -16073,6 +13654,833 @@
     </mc:Choice>
     <mc:Fallback xmlns="">
       <p:transition/>
+    </mc:Fallback>
+  </mc:AlternateContent>
+</p:sld>
+</file>
+
+<file path=ppt/slides/slide9.xml><?xml version="1.0" encoding="utf-8"?>
+<p:sld xmlns:a="http://schemas.openxmlformats.org/drawingml/2006/main" xmlns:r="http://schemas.openxmlformats.org/officeDocument/2006/relationships" xmlns:p="http://schemas.openxmlformats.org/presentationml/2006/main">
+  <p:cSld>
+    <p:bg>
+      <p:bgPr>
+        <a:blipFill>
+          <a:blip r:embed="rId2"/>
+          <a:stretch>
+            <a:fillRect/>
+          </a:stretch>
+        </a:blipFill>
+        <a:effectLst/>
+      </p:bgPr>
+    </p:bg>
+    <p:spTree>
+      <p:nvGrpSpPr>
+        <p:cNvPr id="1" name=""/>
+        <p:cNvGrpSpPr/>
+        <p:nvPr/>
+      </p:nvGrpSpPr>
+      <p:grpSpPr>
+        <a:xfrm>
+          <a:off x="0" y="0"/>
+          <a:ext cx="0" cy="0"/>
+          <a:chOff x="0" y="0"/>
+          <a:chExt cx="0" cy="0"/>
+        </a:xfrm>
+      </p:grpSpPr>
+      <p:sp>
+        <p:nvSpPr>
+          <p:cNvPr id="8" name="Cím 1">
+            <a:extLst>
+              <a:ext uri="{FF2B5EF4-FFF2-40B4-BE49-F238E27FC236}">
+                <a16:creationId xmlns:a16="http://schemas.microsoft.com/office/drawing/2014/main" id="{4826DAFD-3F53-EAE5-5E9A-D8280B521434}"/>
+              </a:ext>
+            </a:extLst>
+          </p:cNvPr>
+          <p:cNvSpPr txBox="1">
+            <a:spLocks/>
+          </p:cNvSpPr>
+          <p:nvPr/>
+        </p:nvSpPr>
+        <p:spPr>
+          <a:xfrm>
+            <a:off x="537412" y="214731"/>
+            <a:ext cx="11127204" cy="1074905"/>
+          </a:xfrm>
+          <a:custGeom>
+            <a:avLst/>
+            <a:gdLst>
+              <a:gd name="csX0" fmla="*/ 0 w 11127204"/>
+              <a:gd name="csY0" fmla="*/ 0 h 1074905"/>
+              <a:gd name="csX1" fmla="*/ 472906 w 11127204"/>
+              <a:gd name="csY1" fmla="*/ 0 h 1074905"/>
+              <a:gd name="csX2" fmla="*/ 834540 w 11127204"/>
+              <a:gd name="csY2" fmla="*/ 0 h 1074905"/>
+              <a:gd name="csX3" fmla="*/ 1641263 w 11127204"/>
+              <a:gd name="csY3" fmla="*/ 0 h 1074905"/>
+              <a:gd name="csX4" fmla="*/ 2559257 w 11127204"/>
+              <a:gd name="csY4" fmla="*/ 0 h 1074905"/>
+              <a:gd name="csX5" fmla="*/ 2920891 w 11127204"/>
+              <a:gd name="csY5" fmla="*/ 0 h 1074905"/>
+              <a:gd name="csX6" fmla="*/ 3838885 w 11127204"/>
+              <a:gd name="csY6" fmla="*/ 0 h 1074905"/>
+              <a:gd name="csX7" fmla="*/ 4423064 w 11127204"/>
+              <a:gd name="csY7" fmla="*/ 0 h 1074905"/>
+              <a:gd name="csX8" fmla="*/ 4895970 w 11127204"/>
+              <a:gd name="csY8" fmla="*/ 0 h 1074905"/>
+              <a:gd name="csX9" fmla="*/ 5368876 w 11127204"/>
+              <a:gd name="csY9" fmla="*/ 0 h 1074905"/>
+              <a:gd name="csX10" fmla="*/ 6064326 w 11127204"/>
+              <a:gd name="csY10" fmla="*/ 0 h 1074905"/>
+              <a:gd name="csX11" fmla="*/ 6871048 w 11127204"/>
+              <a:gd name="csY11" fmla="*/ 0 h 1074905"/>
+              <a:gd name="csX12" fmla="*/ 7789043 w 11127204"/>
+              <a:gd name="csY12" fmla="*/ 0 h 1074905"/>
+              <a:gd name="csX13" fmla="*/ 8707037 w 11127204"/>
+              <a:gd name="csY13" fmla="*/ 0 h 1074905"/>
+              <a:gd name="csX14" fmla="*/ 9513759 w 11127204"/>
+              <a:gd name="csY14" fmla="*/ 0 h 1074905"/>
+              <a:gd name="csX15" fmla="*/ 9986666 w 11127204"/>
+              <a:gd name="csY15" fmla="*/ 0 h 1074905"/>
+              <a:gd name="csX16" fmla="*/ 10459572 w 11127204"/>
+              <a:gd name="csY16" fmla="*/ 0 h 1074905"/>
+              <a:gd name="csX17" fmla="*/ 11127204 w 11127204"/>
+              <a:gd name="csY17" fmla="*/ 0 h 1074905"/>
+              <a:gd name="csX18" fmla="*/ 11127204 w 11127204"/>
+              <a:gd name="csY18" fmla="*/ 548202 h 1074905"/>
+              <a:gd name="csX19" fmla="*/ 11127204 w 11127204"/>
+              <a:gd name="csY19" fmla="*/ 1074905 h 1074905"/>
+              <a:gd name="csX20" fmla="*/ 10320482 w 11127204"/>
+              <a:gd name="csY20" fmla="*/ 1074905 h 1074905"/>
+              <a:gd name="csX21" fmla="*/ 9625031 w 11127204"/>
+              <a:gd name="csY21" fmla="*/ 1074905 h 1074905"/>
+              <a:gd name="csX22" fmla="*/ 8929581 w 11127204"/>
+              <a:gd name="csY22" fmla="*/ 1074905 h 1074905"/>
+              <a:gd name="csX23" fmla="*/ 8234131 w 11127204"/>
+              <a:gd name="csY23" fmla="*/ 1074905 h 1074905"/>
+              <a:gd name="csX24" fmla="*/ 7761225 w 11127204"/>
+              <a:gd name="csY24" fmla="*/ 1074905 h 1074905"/>
+              <a:gd name="csX25" fmla="*/ 6843230 w 11127204"/>
+              <a:gd name="csY25" fmla="*/ 1074905 h 1074905"/>
+              <a:gd name="csX26" fmla="*/ 6370324 w 11127204"/>
+              <a:gd name="csY26" fmla="*/ 1074905 h 1074905"/>
+              <a:gd name="csX27" fmla="*/ 6008690 w 11127204"/>
+              <a:gd name="csY27" fmla="*/ 1074905 h 1074905"/>
+              <a:gd name="csX28" fmla="*/ 5090696 w 11127204"/>
+              <a:gd name="csY28" fmla="*/ 1074905 h 1074905"/>
+              <a:gd name="csX29" fmla="*/ 4617790 w 11127204"/>
+              <a:gd name="csY29" fmla="*/ 1074905 h 1074905"/>
+              <a:gd name="csX30" fmla="*/ 4033611 w 11127204"/>
+              <a:gd name="csY30" fmla="*/ 1074905 h 1074905"/>
+              <a:gd name="csX31" fmla="*/ 3115617 w 11127204"/>
+              <a:gd name="csY31" fmla="*/ 1074905 h 1074905"/>
+              <a:gd name="csX32" fmla="*/ 2197623 w 11127204"/>
+              <a:gd name="csY32" fmla="*/ 1074905 h 1074905"/>
+              <a:gd name="csX33" fmla="*/ 1502173 w 11127204"/>
+              <a:gd name="csY33" fmla="*/ 1074905 h 1074905"/>
+              <a:gd name="csX34" fmla="*/ 917994 w 11127204"/>
+              <a:gd name="csY34" fmla="*/ 1074905 h 1074905"/>
+              <a:gd name="csX35" fmla="*/ 0 w 11127204"/>
+              <a:gd name="csY35" fmla="*/ 1074905 h 1074905"/>
+              <a:gd name="csX36" fmla="*/ 0 w 11127204"/>
+              <a:gd name="csY36" fmla="*/ 526703 h 1074905"/>
+              <a:gd name="csX37" fmla="*/ 0 w 11127204"/>
+              <a:gd name="csY37" fmla="*/ 0 h 1074905"/>
+            </a:gdLst>
+            <a:ahLst/>
+            <a:cxnLst>
+              <a:cxn ang="0">
+                <a:pos x="csX0" y="csY0"/>
+              </a:cxn>
+              <a:cxn ang="0">
+                <a:pos x="csX1" y="csY1"/>
+              </a:cxn>
+              <a:cxn ang="0">
+                <a:pos x="csX2" y="csY2"/>
+              </a:cxn>
+              <a:cxn ang="0">
+                <a:pos x="csX3" y="csY3"/>
+              </a:cxn>
+              <a:cxn ang="0">
+                <a:pos x="csX4" y="csY4"/>
+              </a:cxn>
+              <a:cxn ang="0">
+                <a:pos x="csX5" y="csY5"/>
+              </a:cxn>
+              <a:cxn ang="0">
+                <a:pos x="csX6" y="csY6"/>
+              </a:cxn>
+              <a:cxn ang="0">
+                <a:pos x="csX7" y="csY7"/>
+              </a:cxn>
+              <a:cxn ang="0">
+                <a:pos x="csX8" y="csY8"/>
+              </a:cxn>
+              <a:cxn ang="0">
+                <a:pos x="csX9" y="csY9"/>
+              </a:cxn>
+              <a:cxn ang="0">
+                <a:pos x="csX10" y="csY10"/>
+              </a:cxn>
+              <a:cxn ang="0">
+                <a:pos x="csX11" y="csY11"/>
+              </a:cxn>
+              <a:cxn ang="0">
+                <a:pos x="csX12" y="csY12"/>
+              </a:cxn>
+              <a:cxn ang="0">
+                <a:pos x="csX13" y="csY13"/>
+              </a:cxn>
+              <a:cxn ang="0">
+                <a:pos x="csX14" y="csY14"/>
+              </a:cxn>
+              <a:cxn ang="0">
+                <a:pos x="csX15" y="csY15"/>
+              </a:cxn>
+              <a:cxn ang="0">
+                <a:pos x="csX16" y="csY16"/>
+              </a:cxn>
+              <a:cxn ang="0">
+                <a:pos x="csX17" y="csY17"/>
+              </a:cxn>
+              <a:cxn ang="0">
+                <a:pos x="csX18" y="csY18"/>
+              </a:cxn>
+              <a:cxn ang="0">
+                <a:pos x="csX19" y="csY19"/>
+              </a:cxn>
+              <a:cxn ang="0">
+                <a:pos x="csX20" y="csY20"/>
+              </a:cxn>
+              <a:cxn ang="0">
+                <a:pos x="csX21" y="csY21"/>
+              </a:cxn>
+              <a:cxn ang="0">
+                <a:pos x="csX22" y="csY22"/>
+              </a:cxn>
+              <a:cxn ang="0">
+                <a:pos x="csX23" y="csY23"/>
+              </a:cxn>
+              <a:cxn ang="0">
+                <a:pos x="csX24" y="csY24"/>
+              </a:cxn>
+              <a:cxn ang="0">
+                <a:pos x="csX25" y="csY25"/>
+              </a:cxn>
+              <a:cxn ang="0">
+                <a:pos x="csX26" y="csY26"/>
+              </a:cxn>
+              <a:cxn ang="0">
+                <a:pos x="csX27" y="csY27"/>
+              </a:cxn>
+              <a:cxn ang="0">
+                <a:pos x="csX28" y="csY28"/>
+              </a:cxn>
+              <a:cxn ang="0">
+                <a:pos x="csX29" y="csY29"/>
+              </a:cxn>
+              <a:cxn ang="0">
+                <a:pos x="csX30" y="csY30"/>
+              </a:cxn>
+              <a:cxn ang="0">
+                <a:pos x="csX31" y="csY31"/>
+              </a:cxn>
+              <a:cxn ang="0">
+                <a:pos x="csX32" y="csY32"/>
+              </a:cxn>
+              <a:cxn ang="0">
+                <a:pos x="csX33" y="csY33"/>
+              </a:cxn>
+              <a:cxn ang="0">
+                <a:pos x="csX34" y="csY34"/>
+              </a:cxn>
+              <a:cxn ang="0">
+                <a:pos x="csX35" y="csY35"/>
+              </a:cxn>
+              <a:cxn ang="0">
+                <a:pos x="csX36" y="csY36"/>
+              </a:cxn>
+              <a:cxn ang="0">
+                <a:pos x="csX37" y="csY37"/>
+              </a:cxn>
+            </a:cxnLst>
+            <a:rect l="l" t="t" r="r" b="b"/>
+            <a:pathLst>
+              <a:path w="11127204" h="1074905" extrusionOk="0">
+                <a:moveTo>
+                  <a:pt x="0" y="0"/>
+                </a:moveTo>
+                <a:cubicBezTo>
+                  <a:pt x="173725" y="7780"/>
+                  <a:pt x="362577" y="-18298"/>
+                  <a:pt x="472906" y="0"/>
+                </a:cubicBezTo>
+                <a:cubicBezTo>
+                  <a:pt x="583235" y="18298"/>
+                  <a:pt x="701416" y="-12323"/>
+                  <a:pt x="834540" y="0"/>
+                </a:cubicBezTo>
+                <a:cubicBezTo>
+                  <a:pt x="967664" y="12323"/>
+                  <a:pt x="1357309" y="36907"/>
+                  <a:pt x="1641263" y="0"/>
+                </a:cubicBezTo>
+                <a:cubicBezTo>
+                  <a:pt x="1925217" y="-36907"/>
+                  <a:pt x="2142541" y="27510"/>
+                  <a:pt x="2559257" y="0"/>
+                </a:cubicBezTo>
+                <a:cubicBezTo>
+                  <a:pt x="2975973" y="-27510"/>
+                  <a:pt x="2747929" y="-15189"/>
+                  <a:pt x="2920891" y="0"/>
+                </a:cubicBezTo>
+                <a:cubicBezTo>
+                  <a:pt x="3093853" y="15189"/>
+                  <a:pt x="3648561" y="-25584"/>
+                  <a:pt x="3838885" y="0"/>
+                </a:cubicBezTo>
+                <a:cubicBezTo>
+                  <a:pt x="4029209" y="25584"/>
+                  <a:pt x="4232161" y="-20498"/>
+                  <a:pt x="4423064" y="0"/>
+                </a:cubicBezTo>
+                <a:cubicBezTo>
+                  <a:pt x="4613967" y="20498"/>
+                  <a:pt x="4797039" y="-13016"/>
+                  <a:pt x="4895970" y="0"/>
+                </a:cubicBezTo>
+                <a:cubicBezTo>
+                  <a:pt x="4994901" y="13016"/>
+                  <a:pt x="5174223" y="21709"/>
+                  <a:pt x="5368876" y="0"/>
+                </a:cubicBezTo>
+                <a:cubicBezTo>
+                  <a:pt x="5563529" y="-21709"/>
+                  <a:pt x="5723187" y="-7574"/>
+                  <a:pt x="6064326" y="0"/>
+                </a:cubicBezTo>
+                <a:cubicBezTo>
+                  <a:pt x="6405465" y="7574"/>
+                  <a:pt x="6468590" y="12486"/>
+                  <a:pt x="6871048" y="0"/>
+                </a:cubicBezTo>
+                <a:cubicBezTo>
+                  <a:pt x="7273506" y="-12486"/>
+                  <a:pt x="7424074" y="-45380"/>
+                  <a:pt x="7789043" y="0"/>
+                </a:cubicBezTo>
+                <a:cubicBezTo>
+                  <a:pt x="8154013" y="45380"/>
+                  <a:pt x="8439666" y="-39445"/>
+                  <a:pt x="8707037" y="0"/>
+                </a:cubicBezTo>
+                <a:cubicBezTo>
+                  <a:pt x="8974408" y="39445"/>
+                  <a:pt x="9147635" y="-12593"/>
+                  <a:pt x="9513759" y="0"/>
+                </a:cubicBezTo>
+                <a:cubicBezTo>
+                  <a:pt x="9879883" y="12593"/>
+                  <a:pt x="9815420" y="1717"/>
+                  <a:pt x="9986666" y="0"/>
+                </a:cubicBezTo>
+                <a:cubicBezTo>
+                  <a:pt x="10157912" y="-1717"/>
+                  <a:pt x="10254876" y="17543"/>
+                  <a:pt x="10459572" y="0"/>
+                </a:cubicBezTo>
+                <a:cubicBezTo>
+                  <a:pt x="10664268" y="-17543"/>
+                  <a:pt x="10968587" y="-18155"/>
+                  <a:pt x="11127204" y="0"/>
+                </a:cubicBezTo>
+                <a:cubicBezTo>
+                  <a:pt x="11134549" y="148727"/>
+                  <a:pt x="11147386" y="365366"/>
+                  <a:pt x="11127204" y="548202"/>
+                </a:cubicBezTo>
+                <a:cubicBezTo>
+                  <a:pt x="11107022" y="731038"/>
+                  <a:pt x="11147208" y="823314"/>
+                  <a:pt x="11127204" y="1074905"/>
+                </a:cubicBezTo>
+                <a:cubicBezTo>
+                  <a:pt x="10926449" y="1108939"/>
+                  <a:pt x="10643626" y="1100935"/>
+                  <a:pt x="10320482" y="1074905"/>
+                </a:cubicBezTo>
+                <a:cubicBezTo>
+                  <a:pt x="9997338" y="1048875"/>
+                  <a:pt x="9798690" y="1079340"/>
+                  <a:pt x="9625031" y="1074905"/>
+                </a:cubicBezTo>
+                <a:cubicBezTo>
+                  <a:pt x="9451372" y="1070470"/>
+                  <a:pt x="9260205" y="1063922"/>
+                  <a:pt x="8929581" y="1074905"/>
+                </a:cubicBezTo>
+                <a:cubicBezTo>
+                  <a:pt x="8598957" y="1085889"/>
+                  <a:pt x="8387884" y="1088107"/>
+                  <a:pt x="8234131" y="1074905"/>
+                </a:cubicBezTo>
+                <a:cubicBezTo>
+                  <a:pt x="8080378" y="1061704"/>
+                  <a:pt x="7968841" y="1065103"/>
+                  <a:pt x="7761225" y="1074905"/>
+                </a:cubicBezTo>
+                <a:cubicBezTo>
+                  <a:pt x="7553609" y="1084707"/>
+                  <a:pt x="7173541" y="1103906"/>
+                  <a:pt x="6843230" y="1074905"/>
+                </a:cubicBezTo>
+                <a:cubicBezTo>
+                  <a:pt x="6512920" y="1045904"/>
+                  <a:pt x="6495232" y="1055676"/>
+                  <a:pt x="6370324" y="1074905"/>
+                </a:cubicBezTo>
+                <a:cubicBezTo>
+                  <a:pt x="6245416" y="1094134"/>
+                  <a:pt x="6176547" y="1056994"/>
+                  <a:pt x="6008690" y="1074905"/>
+                </a:cubicBezTo>
+                <a:cubicBezTo>
+                  <a:pt x="5840833" y="1092816"/>
+                  <a:pt x="5316460" y="1053272"/>
+                  <a:pt x="5090696" y="1074905"/>
+                </a:cubicBezTo>
+                <a:cubicBezTo>
+                  <a:pt x="4864932" y="1096538"/>
+                  <a:pt x="4824564" y="1095127"/>
+                  <a:pt x="4617790" y="1074905"/>
+                </a:cubicBezTo>
+                <a:cubicBezTo>
+                  <a:pt x="4411016" y="1054683"/>
+                  <a:pt x="4164182" y="1082286"/>
+                  <a:pt x="4033611" y="1074905"/>
+                </a:cubicBezTo>
+                <a:cubicBezTo>
+                  <a:pt x="3903040" y="1067524"/>
+                  <a:pt x="3401016" y="1069592"/>
+                  <a:pt x="3115617" y="1074905"/>
+                </a:cubicBezTo>
+                <a:cubicBezTo>
+                  <a:pt x="2830218" y="1080218"/>
+                  <a:pt x="2516429" y="1040037"/>
+                  <a:pt x="2197623" y="1074905"/>
+                </a:cubicBezTo>
+                <a:cubicBezTo>
+                  <a:pt x="1878817" y="1109773"/>
+                  <a:pt x="1654573" y="1095310"/>
+                  <a:pt x="1502173" y="1074905"/>
+                </a:cubicBezTo>
+                <a:cubicBezTo>
+                  <a:pt x="1349773" y="1054501"/>
+                  <a:pt x="1075836" y="1061315"/>
+                  <a:pt x="917994" y="1074905"/>
+                </a:cubicBezTo>
+                <a:cubicBezTo>
+                  <a:pt x="760152" y="1088495"/>
+                  <a:pt x="207300" y="1063789"/>
+                  <a:pt x="0" y="1074905"/>
+                </a:cubicBezTo>
+                <a:cubicBezTo>
+                  <a:pt x="-19422" y="866722"/>
+                  <a:pt x="-18832" y="646541"/>
+                  <a:pt x="0" y="526703"/>
+                </a:cubicBezTo>
+                <a:cubicBezTo>
+                  <a:pt x="18832" y="406865"/>
+                  <a:pt x="9390" y="175443"/>
+                  <a:pt x="0" y="0"/>
+                </a:cubicBezTo>
+                <a:close/>
+              </a:path>
+            </a:pathLst>
+          </a:custGeom>
+          <a:noFill/>
+          <a:ln>
+            <a:solidFill>
+              <a:schemeClr val="bg1"/>
+            </a:solidFill>
+            <a:extLst>
+              <a:ext uri="{C807C97D-BFC1-408E-A445-0C87EB9F89A2}">
+                <ask:lineSketchStyleProps xmlns:ask="http://schemas.microsoft.com/office/drawing/2018/sketchyshapes" sd="3065852334">
+                  <a:prstGeom prst="rect">
+                    <a:avLst/>
+                  </a:prstGeom>
+                  <ask:type>
+                    <ask:lineSketchFreehand/>
+                  </ask:type>
+                </ask:lineSketchStyleProps>
+              </a:ext>
+            </a:extLst>
+          </a:ln>
+        </p:spPr>
+        <p:txBody>
+          <a:bodyPr vert="horz" lIns="91440" tIns="45720" rIns="91440" bIns="45720" rtlCol="0" anchor="ctr">
+            <a:normAutofit/>
+          </a:bodyPr>
+          <a:lstStyle>
+            <a:lvl1pPr algn="l" defTabSz="914400" rtl="0" eaLnBrk="1" latinLnBrk="0" hangingPunct="1">
+              <a:lnSpc>
+                <a:spcPct val="90000"/>
+              </a:lnSpc>
+              <a:spcBef>
+                <a:spcPct val="0"/>
+              </a:spcBef>
+              <a:buNone/>
+              <a:defRPr sz="4400" kern="1200">
+                <a:solidFill>
+                  <a:schemeClr val="tx1"/>
+                </a:solidFill>
+                <a:latin typeface="+mj-lt"/>
+                <a:ea typeface="+mj-ea"/>
+                <a:cs typeface="+mj-cs"/>
+              </a:defRPr>
+            </a:lvl1pPr>
+          </a:lstStyle>
+          <a:p>
+            <a:pPr algn="ctr"/>
+            <a:r>
+              <a:rPr lang="hu-HU" dirty="0">
+                <a:solidFill>
+                  <a:schemeClr val="bg1"/>
+                </a:solidFill>
+              </a:rPr>
+              <a:t>Élő demó</a:t>
+            </a:r>
+          </a:p>
+        </p:txBody>
+      </p:sp>
+      <p:pic>
+        <p:nvPicPr>
+          <p:cNvPr id="2" name="Kép 1" descr="Discord Wordmark Color Logo PNG Vector">
+            <a:extLst>
+              <a:ext uri="{FF2B5EF4-FFF2-40B4-BE49-F238E27FC236}">
+                <a16:creationId xmlns:a16="http://schemas.microsoft.com/office/drawing/2014/main" id="{F2FE7C27-F2E2-3415-CAE1-07FF094CC96D}"/>
+              </a:ext>
+            </a:extLst>
+          </p:cNvPr>
+          <p:cNvPicPr>
+            <a:picLocks noChangeAspect="1"/>
+          </p:cNvPicPr>
+          <p:nvPr/>
+        </p:nvPicPr>
+        <p:blipFill>
+          <a:blip r:embed="rId3"/>
+          <a:srcRect t="36423" r="233" b="36364"/>
+          <a:stretch>
+            <a:fillRect/>
+          </a:stretch>
+        </p:blipFill>
+        <p:spPr>
+          <a:xfrm>
+            <a:off x="4127882" y="3326892"/>
+            <a:ext cx="3936243" cy="1073698"/>
+          </a:xfrm>
+          <a:custGeom>
+            <a:avLst/>
+            <a:gdLst>
+              <a:gd name="csX0" fmla="*/ 0 w 3936243"/>
+              <a:gd name="csY0" fmla="*/ 0 h 1073698"/>
+              <a:gd name="csX1" fmla="*/ 656041 w 3936243"/>
+              <a:gd name="csY1" fmla="*/ 0 h 1073698"/>
+              <a:gd name="csX2" fmla="*/ 1193994 w 3936243"/>
+              <a:gd name="csY2" fmla="*/ 0 h 1073698"/>
+              <a:gd name="csX3" fmla="*/ 1928759 w 3936243"/>
+              <a:gd name="csY3" fmla="*/ 0 h 1073698"/>
+              <a:gd name="csX4" fmla="*/ 2466712 w 3936243"/>
+              <a:gd name="csY4" fmla="*/ 0 h 1073698"/>
+              <a:gd name="csX5" fmla="*/ 3004665 w 3936243"/>
+              <a:gd name="csY5" fmla="*/ 0 h 1073698"/>
+              <a:gd name="csX6" fmla="*/ 3936243 w 3936243"/>
+              <a:gd name="csY6" fmla="*/ 0 h 1073698"/>
+              <a:gd name="csX7" fmla="*/ 3936243 w 3936243"/>
+              <a:gd name="csY7" fmla="*/ 547586 h 1073698"/>
+              <a:gd name="csX8" fmla="*/ 3936243 w 3936243"/>
+              <a:gd name="csY8" fmla="*/ 1073698 h 1073698"/>
+              <a:gd name="csX9" fmla="*/ 3240840 w 3936243"/>
+              <a:gd name="csY9" fmla="*/ 1073698 h 1073698"/>
+              <a:gd name="csX10" fmla="*/ 2584800 w 3936243"/>
+              <a:gd name="csY10" fmla="*/ 1073698 h 1073698"/>
+              <a:gd name="csX11" fmla="*/ 2046846 w 3936243"/>
+              <a:gd name="csY11" fmla="*/ 1073698 h 1073698"/>
+              <a:gd name="csX12" fmla="*/ 1430168 w 3936243"/>
+              <a:gd name="csY12" fmla="*/ 1073698 h 1073698"/>
+              <a:gd name="csX13" fmla="*/ 813490 w 3936243"/>
+              <a:gd name="csY13" fmla="*/ 1073698 h 1073698"/>
+              <a:gd name="csX14" fmla="*/ 0 w 3936243"/>
+              <a:gd name="csY14" fmla="*/ 1073698 h 1073698"/>
+              <a:gd name="csX15" fmla="*/ 0 w 3936243"/>
+              <a:gd name="csY15" fmla="*/ 547586 h 1073698"/>
+              <a:gd name="csX16" fmla="*/ 0 w 3936243"/>
+              <a:gd name="csY16" fmla="*/ 0 h 1073698"/>
+            </a:gdLst>
+            <a:ahLst/>
+            <a:cxnLst>
+              <a:cxn ang="0">
+                <a:pos x="csX0" y="csY0"/>
+              </a:cxn>
+              <a:cxn ang="0">
+                <a:pos x="csX1" y="csY1"/>
+              </a:cxn>
+              <a:cxn ang="0">
+                <a:pos x="csX2" y="csY2"/>
+              </a:cxn>
+              <a:cxn ang="0">
+                <a:pos x="csX3" y="csY3"/>
+              </a:cxn>
+              <a:cxn ang="0">
+                <a:pos x="csX4" y="csY4"/>
+              </a:cxn>
+              <a:cxn ang="0">
+                <a:pos x="csX5" y="csY5"/>
+              </a:cxn>
+              <a:cxn ang="0">
+                <a:pos x="csX6" y="csY6"/>
+              </a:cxn>
+              <a:cxn ang="0">
+                <a:pos x="csX7" y="csY7"/>
+              </a:cxn>
+              <a:cxn ang="0">
+                <a:pos x="csX8" y="csY8"/>
+              </a:cxn>
+              <a:cxn ang="0">
+                <a:pos x="csX9" y="csY9"/>
+              </a:cxn>
+              <a:cxn ang="0">
+                <a:pos x="csX10" y="csY10"/>
+              </a:cxn>
+              <a:cxn ang="0">
+                <a:pos x="csX11" y="csY11"/>
+              </a:cxn>
+              <a:cxn ang="0">
+                <a:pos x="csX12" y="csY12"/>
+              </a:cxn>
+              <a:cxn ang="0">
+                <a:pos x="csX13" y="csY13"/>
+              </a:cxn>
+              <a:cxn ang="0">
+                <a:pos x="csX14" y="csY14"/>
+              </a:cxn>
+              <a:cxn ang="0">
+                <a:pos x="csX15" y="csY15"/>
+              </a:cxn>
+              <a:cxn ang="0">
+                <a:pos x="csX16" y="csY16"/>
+              </a:cxn>
+            </a:cxnLst>
+            <a:rect l="l" t="t" r="r" b="b"/>
+            <a:pathLst>
+              <a:path w="3936243" h="1073698" fill="none" extrusionOk="0">
+                <a:moveTo>
+                  <a:pt x="0" y="0"/>
+                </a:moveTo>
+                <a:cubicBezTo>
+                  <a:pt x="229008" y="-6596"/>
+                  <a:pt x="421359" y="-25725"/>
+                  <a:pt x="656041" y="0"/>
+                </a:cubicBezTo>
+                <a:cubicBezTo>
+                  <a:pt x="890723" y="25725"/>
+                  <a:pt x="1046388" y="-4705"/>
+                  <a:pt x="1193994" y="0"/>
+                </a:cubicBezTo>
+                <a:cubicBezTo>
+                  <a:pt x="1341600" y="4705"/>
+                  <a:pt x="1698115" y="21474"/>
+                  <a:pt x="1928759" y="0"/>
+                </a:cubicBezTo>
+                <a:cubicBezTo>
+                  <a:pt x="2159404" y="-21474"/>
+                  <a:pt x="2314326" y="5089"/>
+                  <a:pt x="2466712" y="0"/>
+                </a:cubicBezTo>
+                <a:cubicBezTo>
+                  <a:pt x="2619098" y="-5089"/>
+                  <a:pt x="2737336" y="-5982"/>
+                  <a:pt x="3004665" y="0"/>
+                </a:cubicBezTo>
+                <a:cubicBezTo>
+                  <a:pt x="3271994" y="5982"/>
+                  <a:pt x="3666966" y="-17247"/>
+                  <a:pt x="3936243" y="0"/>
+                </a:cubicBezTo>
+                <a:cubicBezTo>
+                  <a:pt x="3942330" y="251350"/>
+                  <a:pt x="3951844" y="314615"/>
+                  <a:pt x="3936243" y="547586"/>
+                </a:cubicBezTo>
+                <a:cubicBezTo>
+                  <a:pt x="3920642" y="780557"/>
+                  <a:pt x="3921598" y="905819"/>
+                  <a:pt x="3936243" y="1073698"/>
+                </a:cubicBezTo>
+                <a:cubicBezTo>
+                  <a:pt x="3787402" y="1060124"/>
+                  <a:pt x="3522706" y="1041171"/>
+                  <a:pt x="3240840" y="1073698"/>
+                </a:cubicBezTo>
+                <a:cubicBezTo>
+                  <a:pt x="2958974" y="1106225"/>
+                  <a:pt x="2903055" y="1071075"/>
+                  <a:pt x="2584800" y="1073698"/>
+                </a:cubicBezTo>
+                <a:cubicBezTo>
+                  <a:pt x="2266545" y="1076321"/>
+                  <a:pt x="2238007" y="1099317"/>
+                  <a:pt x="2046846" y="1073698"/>
+                </a:cubicBezTo>
+                <a:cubicBezTo>
+                  <a:pt x="1855685" y="1048079"/>
+                  <a:pt x="1586315" y="1104315"/>
+                  <a:pt x="1430168" y="1073698"/>
+                </a:cubicBezTo>
+                <a:cubicBezTo>
+                  <a:pt x="1274021" y="1043081"/>
+                  <a:pt x="1085446" y="1078857"/>
+                  <a:pt x="813490" y="1073698"/>
+                </a:cubicBezTo>
+                <a:cubicBezTo>
+                  <a:pt x="541534" y="1068539"/>
+                  <a:pt x="222912" y="1077648"/>
+                  <a:pt x="0" y="1073698"/>
+                </a:cubicBezTo>
+                <a:cubicBezTo>
+                  <a:pt x="-15506" y="926964"/>
+                  <a:pt x="10291" y="727155"/>
+                  <a:pt x="0" y="547586"/>
+                </a:cubicBezTo>
+                <a:cubicBezTo>
+                  <a:pt x="-10291" y="368017"/>
+                  <a:pt x="10122" y="127800"/>
+                  <a:pt x="0" y="0"/>
+                </a:cubicBezTo>
+                <a:close/>
+              </a:path>
+              <a:path w="3936243" h="1073698" stroke="0" extrusionOk="0">
+                <a:moveTo>
+                  <a:pt x="0" y="0"/>
+                </a:moveTo>
+                <a:cubicBezTo>
+                  <a:pt x="209543" y="-5943"/>
+                  <a:pt x="334955" y="-14925"/>
+                  <a:pt x="537953" y="0"/>
+                </a:cubicBezTo>
+                <a:cubicBezTo>
+                  <a:pt x="740951" y="14925"/>
+                  <a:pt x="913657" y="21530"/>
+                  <a:pt x="1272719" y="0"/>
+                </a:cubicBezTo>
+                <a:cubicBezTo>
+                  <a:pt x="1631781" y="-21530"/>
+                  <a:pt x="1617082" y="-13450"/>
+                  <a:pt x="1928759" y="0"/>
+                </a:cubicBezTo>
+                <a:cubicBezTo>
+                  <a:pt x="2240436" y="13450"/>
+                  <a:pt x="2256910" y="20857"/>
+                  <a:pt x="2506075" y="0"/>
+                </a:cubicBezTo>
+                <a:cubicBezTo>
+                  <a:pt x="2755240" y="-20857"/>
+                  <a:pt x="2889232" y="10903"/>
+                  <a:pt x="3162115" y="0"/>
+                </a:cubicBezTo>
+                <a:cubicBezTo>
+                  <a:pt x="3434998" y="-10903"/>
+                  <a:pt x="3726666" y="-17797"/>
+                  <a:pt x="3936243" y="0"/>
+                </a:cubicBezTo>
+                <a:cubicBezTo>
+                  <a:pt x="3934998" y="256299"/>
+                  <a:pt x="3917281" y="302288"/>
+                  <a:pt x="3936243" y="547586"/>
+                </a:cubicBezTo>
+                <a:cubicBezTo>
+                  <a:pt x="3955205" y="792884"/>
+                  <a:pt x="3961278" y="963504"/>
+                  <a:pt x="3936243" y="1073698"/>
+                </a:cubicBezTo>
+                <a:cubicBezTo>
+                  <a:pt x="3691480" y="1088548"/>
+                  <a:pt x="3413635" y="1064605"/>
+                  <a:pt x="3201478" y="1073698"/>
+                </a:cubicBezTo>
+                <a:cubicBezTo>
+                  <a:pt x="2989322" y="1082791"/>
+                  <a:pt x="2871424" y="1095707"/>
+                  <a:pt x="2545437" y="1073698"/>
+                </a:cubicBezTo>
+                <a:cubicBezTo>
+                  <a:pt x="2219450" y="1051689"/>
+                  <a:pt x="2028034" y="1074229"/>
+                  <a:pt x="1850034" y="1073698"/>
+                </a:cubicBezTo>
+                <a:cubicBezTo>
+                  <a:pt x="1672034" y="1073167"/>
+                  <a:pt x="1325799" y="1099150"/>
+                  <a:pt x="1154631" y="1073698"/>
+                </a:cubicBezTo>
+                <a:cubicBezTo>
+                  <a:pt x="983463" y="1048246"/>
+                  <a:pt x="502528" y="1104143"/>
+                  <a:pt x="0" y="1073698"/>
+                </a:cubicBezTo>
+                <a:cubicBezTo>
+                  <a:pt x="1242" y="847404"/>
+                  <a:pt x="-20210" y="775475"/>
+                  <a:pt x="0" y="515375"/>
+                </a:cubicBezTo>
+                <a:cubicBezTo>
+                  <a:pt x="20210" y="255275"/>
+                  <a:pt x="-1812" y="163320"/>
+                  <a:pt x="0" y="0"/>
+                </a:cubicBezTo>
+                <a:close/>
+              </a:path>
+            </a:pathLst>
+          </a:custGeom>
+          <a:ln w="57150">
+            <a:solidFill>
+              <a:schemeClr val="tx1"/>
+            </a:solidFill>
+            <a:extLst>
+              <a:ext uri="{C807C97D-BFC1-408E-A445-0C87EB9F89A2}">
+                <ask:lineSketchStyleProps xmlns:ask="http://schemas.microsoft.com/office/drawing/2018/sketchyshapes" sd="3377342847">
+                  <a:prstGeom prst="rect">
+                    <a:avLst/>
+                  </a:prstGeom>
+                  <ask:type>
+                    <ask:lineSketchFreehand/>
+                  </ask:type>
+                </ask:lineSketchStyleProps>
+              </a:ext>
+            </a:extLst>
+          </a:ln>
+        </p:spPr>
+      </p:pic>
+    </p:spTree>
+    <p:extLst>
+      <p:ext uri="{BB962C8B-B14F-4D97-AF65-F5344CB8AC3E}">
+        <p14:creationId xmlns:p14="http://schemas.microsoft.com/office/powerpoint/2010/main" val="2094377966"/>
+      </p:ext>
+    </p:extLst>
+  </p:cSld>
+  <p:clrMapOvr>
+    <a:masterClrMapping/>
+  </p:clrMapOvr>
+  <mc:AlternateContent xmlns:mc="http://schemas.openxmlformats.org/markup-compatibility/2006" xmlns:p14="http://schemas.microsoft.com/office/powerpoint/2010/main">
+    <mc:Choice Requires="p14">
+      <p:transition spd="slow" p14:dur="1300">
+        <p14:pan dir="u"/>
+      </p:transition>
+    </mc:Choice>
+    <mc:Fallback xmlns="">
+      <p:transition spd="slow">
+        <p:fade/>
+      </p:transition>
     </mc:Fallback>
   </mc:AlternateContent>
 </p:sld>
